--- a/output_pptx/King_Of_Kings.pptx
+++ b/output_pptx/King_Of_Kings.pptx
@@ -3127,23 +3127,23 @@
         </p:nvSpPr>
         <p:spPr>
           <a:xfrm>
-            <a:off x="594360" y="1837944"/>
-            <a:ext cx="11002975" cy="685800"/>
-          </a:xfrm>
-          <a:prstGeom prst="rect">
-            <a:avLst/>
-          </a:prstGeom>
-          <a:noFill/>
-        </p:spPr>
-        <p:txBody>
-          <a:bodyPr wrap="square">
-            <a:spAutoFit/>
-          </a:bodyPr>
-          <a:lstStyle/>
-          <a:p>
-            <a:pPr algn="ctr"/>
-            <a:r>
-              <a:rPr sz="4400" b="1" i="0">
+            <a:off x="640080" y="1650492"/>
+            <a:ext cx="10911535" cy="731520"/>
+          </a:xfrm>
+          <a:prstGeom prst="rect">
+            <a:avLst/>
+          </a:prstGeom>
+          <a:noFill/>
+        </p:spPr>
+        <p:txBody>
+          <a:bodyPr wrap="square">
+            <a:spAutoFit/>
+          </a:bodyPr>
+          <a:lstStyle/>
+          <a:p>
+            <a:pPr algn="ctr"/>
+            <a:r>
+              <a:rPr sz="4800" b="1" i="0">
                 <a:solidFill>
                   <a:srgbClr val="FFFFFF"/>
                 </a:solidFill>
@@ -3162,8 +3162,8 @@
         </p:nvSpPr>
         <p:spPr>
           <a:xfrm>
-            <a:off x="594360" y="2560320"/>
-            <a:ext cx="11002975" cy="384048"/>
+            <a:off x="640080" y="2418588"/>
+            <a:ext cx="10911535" cy="365760"/>
           </a:xfrm>
           <a:prstGeom prst="rect">
             <a:avLst/>
@@ -3180,7 +3180,7 @@
             <a:r>
               <a:rPr sz="2400" b="0" i="1">
                 <a:solidFill>
-                  <a:srgbClr val="B4B4B4"/>
+                  <a:srgbClr val="AAAAAA"/>
                 </a:solidFill>
                 <a:latin typeface="Arial"/>
               </a:rPr>
@@ -3197,8 +3197,78 @@
         </p:nvSpPr>
         <p:spPr>
           <a:xfrm>
-            <a:off x="594360" y="2980944"/>
-            <a:ext cx="11002975" cy="347472"/>
+            <a:off x="640080" y="2985516"/>
+            <a:ext cx="10911535" cy="731520"/>
+          </a:xfrm>
+          <a:prstGeom prst="rect">
+            <a:avLst/>
+          </a:prstGeom>
+          <a:noFill/>
+        </p:spPr>
+        <p:txBody>
+          <a:bodyPr wrap="square">
+            <a:spAutoFit/>
+          </a:bodyPr>
+          <a:lstStyle/>
+          <a:p>
+            <a:pPr algn="ctr"/>
+            <a:r>
+              <a:rPr sz="4800" b="1" i="0">
+                <a:solidFill>
+                  <a:srgbClr val="FFFFFF"/>
+                </a:solidFill>
+                <a:latin typeface="Arial"/>
+              </a:rPr>
+              <a:t>天から駆け寄る      神のあわれみ</a:t>
+            </a:r>
+          </a:p>
+        </p:txBody>
+      </p:sp>
+      <p:sp>
+        <p:nvSpPr>
+          <p:cNvPr id="5" name="TextBox 4"/>
+          <p:cNvSpPr txBox="1"/>
+          <p:nvPr/>
+        </p:nvSpPr>
+        <p:spPr>
+          <a:xfrm>
+            <a:off x="640080" y="3753612"/>
+            <a:ext cx="10911535" cy="365760"/>
+          </a:xfrm>
+          <a:prstGeom prst="rect">
+            <a:avLst/>
+          </a:prstGeom>
+          <a:noFill/>
+        </p:spPr>
+        <p:txBody>
+          <a:bodyPr wrap="square">
+            <a:spAutoFit/>
+          </a:bodyPr>
+          <a:lstStyle/>
+          <a:p>
+            <a:pPr algn="ctr"/>
+            <a:r>
+              <a:rPr sz="2400" b="0" i="1">
+                <a:solidFill>
+                  <a:srgbClr val="AAAAAA"/>
+                </a:solidFill>
+                <a:latin typeface="Arial"/>
+              </a:rPr>
+              <a:t>tenkarakakeyoru kaminoawaremi</a:t>
+            </a:r>
+          </a:p>
+        </p:txBody>
+      </p:sp>
+      <p:sp>
+        <p:nvSpPr>
+          <p:cNvPr id="6" name="TextBox 5"/>
+          <p:cNvSpPr txBox="1"/>
+          <p:nvPr/>
+        </p:nvSpPr>
+        <p:spPr>
+          <a:xfrm>
+            <a:off x="640080" y="4530852"/>
+            <a:ext cx="10911535" cy="310896"/>
           </a:xfrm>
           <a:prstGeom prst="rect">
             <a:avLst/>
@@ -3215,7 +3285,7 @@
             <a:r>
               <a:rPr sz="2000" b="0" i="1">
                 <a:solidFill>
-                  <a:srgbClr val="8C8C8C"/>
+                  <a:srgbClr val="828282"/>
                 </a:solidFill>
                 <a:latin typeface="Arial"/>
               </a:rPr>
@@ -3226,84 +3296,14 @@
       </p:sp>
       <p:sp>
         <p:nvSpPr>
-          <p:cNvPr id="5" name="TextBox 4"/>
-          <p:cNvSpPr txBox="1"/>
-          <p:nvPr/>
-        </p:nvSpPr>
-        <p:spPr>
-          <a:xfrm>
-            <a:off x="594360" y="3529584"/>
-            <a:ext cx="11002975" cy="685800"/>
-          </a:xfrm>
-          <a:prstGeom prst="rect">
-            <a:avLst/>
-          </a:prstGeom>
-          <a:noFill/>
-        </p:spPr>
-        <p:txBody>
-          <a:bodyPr wrap="square">
-            <a:spAutoFit/>
-          </a:bodyPr>
-          <a:lstStyle/>
-          <a:p>
-            <a:pPr algn="ctr"/>
-            <a:r>
-              <a:rPr sz="4400" b="1" i="0">
-                <a:solidFill>
-                  <a:srgbClr val="FFFFFF"/>
-                </a:solidFill>
-                <a:latin typeface="Arial"/>
-              </a:rPr>
-              <a:t>天から駆け寄る      神のあわれみ</a:t>
-            </a:r>
-          </a:p>
-        </p:txBody>
-      </p:sp>
-      <p:sp>
-        <p:nvSpPr>
-          <p:cNvPr id="6" name="TextBox 5"/>
-          <p:cNvSpPr txBox="1"/>
-          <p:nvPr/>
-        </p:nvSpPr>
-        <p:spPr>
-          <a:xfrm>
-            <a:off x="594360" y="4251960"/>
-            <a:ext cx="11002975" cy="384048"/>
-          </a:xfrm>
-          <a:prstGeom prst="rect">
-            <a:avLst/>
-          </a:prstGeom>
-          <a:noFill/>
-        </p:spPr>
-        <p:txBody>
-          <a:bodyPr wrap="square">
-            <a:spAutoFit/>
-          </a:bodyPr>
-          <a:lstStyle/>
-          <a:p>
-            <a:pPr algn="ctr"/>
-            <a:r>
-              <a:rPr sz="2400" b="0" i="1">
-                <a:solidFill>
-                  <a:srgbClr val="B4B4B4"/>
-                </a:solidFill>
-                <a:latin typeface="Arial"/>
-              </a:rPr>
-              <a:t>tenkarakakeyoru kaminoawaremi</a:t>
-            </a:r>
-          </a:p>
-        </p:txBody>
-      </p:sp>
-      <p:sp>
-        <p:nvSpPr>
           <p:cNvPr id="7" name="TextBox 6"/>
           <p:cNvSpPr txBox="1"/>
           <p:nvPr/>
         </p:nvSpPr>
         <p:spPr>
           <a:xfrm>
-            <a:off x="594360" y="4672584"/>
-            <a:ext cx="11002975" cy="347472"/>
+            <a:off x="640080" y="4896612"/>
+            <a:ext cx="10911535" cy="310896"/>
           </a:xfrm>
           <a:prstGeom prst="rect">
             <a:avLst/>
@@ -3320,7 +3320,7 @@
             <a:r>
               <a:rPr sz="2000" b="0" i="1">
                 <a:solidFill>
-                  <a:srgbClr val="8C8C8C"/>
+                  <a:srgbClr val="828282"/>
                 </a:solidFill>
                 <a:latin typeface="Arial"/>
               </a:rPr>
@@ -3363,23 +3363,23 @@
         </p:nvSpPr>
         <p:spPr>
           <a:xfrm>
-            <a:off x="594360" y="2258568"/>
-            <a:ext cx="11002975" cy="685800"/>
-          </a:xfrm>
-          <a:prstGeom prst="rect">
-            <a:avLst/>
-          </a:prstGeom>
-          <a:noFill/>
-        </p:spPr>
-        <p:txBody>
-          <a:bodyPr wrap="square">
-            <a:spAutoFit/>
-          </a:bodyPr>
-          <a:lstStyle/>
-          <a:p>
-            <a:pPr algn="ctr"/>
-            <a:r>
-              <a:rPr sz="4400" b="1" i="0">
+            <a:off x="640080" y="2052828"/>
+            <a:ext cx="10911535" cy="731520"/>
+          </a:xfrm>
+          <a:prstGeom prst="rect">
+            <a:avLst/>
+          </a:prstGeom>
+          <a:noFill/>
+        </p:spPr>
+        <p:txBody>
+          <a:bodyPr wrap="square">
+            <a:spAutoFit/>
+          </a:bodyPr>
+          <a:lstStyle/>
+          <a:p>
+            <a:pPr algn="ctr"/>
+            <a:r>
+              <a:rPr sz="4800" b="1" i="0">
                 <a:solidFill>
                   <a:srgbClr val="FFFFFF"/>
                 </a:solidFill>
@@ -3398,99 +3398,29 @@
         </p:nvSpPr>
         <p:spPr>
           <a:xfrm>
-            <a:off x="594360" y="2980944"/>
-            <a:ext cx="11002975" cy="347472"/>
-          </a:xfrm>
-          <a:prstGeom prst="rect">
-            <a:avLst/>
-          </a:prstGeom>
-          <a:noFill/>
-        </p:spPr>
-        <p:txBody>
-          <a:bodyPr wrap="square">
-            <a:spAutoFit/>
-          </a:bodyPr>
-          <a:lstStyle/>
-          <a:p>
-            <a:pPr algn="ctr"/>
-            <a:r>
-              <a:rPr sz="2200" b="0" i="1">
-                <a:solidFill>
-                  <a:srgbClr val="8C8C8C"/>
-                </a:solidFill>
-                <a:latin typeface="Arial"/>
-              </a:rPr>
-              <a:t/>
-            </a:r>
-          </a:p>
-        </p:txBody>
-      </p:sp>
-      <p:sp>
-        <p:nvSpPr>
-          <p:cNvPr id="4" name="TextBox 3"/>
-          <p:cNvSpPr txBox="1"/>
-          <p:nvPr/>
-        </p:nvSpPr>
-        <p:spPr>
-          <a:xfrm>
-            <a:off x="594360" y="3529584"/>
-            <a:ext cx="11002975" cy="685800"/>
-          </a:xfrm>
-          <a:prstGeom prst="rect">
-            <a:avLst/>
-          </a:prstGeom>
-          <a:noFill/>
-        </p:spPr>
-        <p:txBody>
-          <a:bodyPr wrap="square">
-            <a:spAutoFit/>
-          </a:bodyPr>
-          <a:lstStyle/>
-          <a:p>
-            <a:pPr algn="ctr"/>
-            <a:r>
-              <a:rPr sz="4400" b="1" i="0">
+            <a:off x="640080" y="2985516"/>
+            <a:ext cx="10911535" cy="731520"/>
+          </a:xfrm>
+          <a:prstGeom prst="rect">
+            <a:avLst/>
+          </a:prstGeom>
+          <a:noFill/>
+        </p:spPr>
+        <p:txBody>
+          <a:bodyPr wrap="square">
+            <a:spAutoFit/>
+          </a:bodyPr>
+          <a:lstStyle/>
+          <a:p>
+            <a:pPr algn="ctr"/>
+            <a:r>
+              <a:rPr sz="4800" b="1" i="0">
                 <a:solidFill>
                   <a:srgbClr val="FFFFFF"/>
                 </a:solidFill>
                 <a:latin typeface="Arial"/>
               </a:rPr>
               <a:t>Deus enviou o Seu Filho</a:t>
-            </a:r>
-          </a:p>
-        </p:txBody>
-      </p:sp>
-      <p:sp>
-        <p:nvSpPr>
-          <p:cNvPr id="5" name="TextBox 4"/>
-          <p:cNvSpPr txBox="1"/>
-          <p:nvPr/>
-        </p:nvSpPr>
-        <p:spPr>
-          <a:xfrm>
-            <a:off x="594360" y="4251960"/>
-            <a:ext cx="11002975" cy="347472"/>
-          </a:xfrm>
-          <a:prstGeom prst="rect">
-            <a:avLst/>
-          </a:prstGeom>
-          <a:noFill/>
-        </p:spPr>
-        <p:txBody>
-          <a:bodyPr wrap="square">
-            <a:spAutoFit/>
-          </a:bodyPr>
-          <a:lstStyle/>
-          <a:p>
-            <a:pPr algn="ctr"/>
-            <a:r>
-              <a:rPr sz="2200" b="0" i="1">
-                <a:solidFill>
-                  <a:srgbClr val="8C8C8C"/>
-                </a:solidFill>
-                <a:latin typeface="Arial"/>
-              </a:rPr>
-              <a:t/>
             </a:r>
           </a:p>
         </p:txBody>
@@ -3529,23 +3459,23 @@
         </p:nvSpPr>
         <p:spPr>
           <a:xfrm>
-            <a:off x="594360" y="2258568"/>
-            <a:ext cx="11002975" cy="685800"/>
-          </a:xfrm>
-          <a:prstGeom prst="rect">
-            <a:avLst/>
-          </a:prstGeom>
-          <a:noFill/>
-        </p:spPr>
-        <p:txBody>
-          <a:bodyPr wrap="square">
-            <a:spAutoFit/>
-          </a:bodyPr>
-          <a:lstStyle/>
-          <a:p>
-            <a:pPr algn="ctr"/>
-            <a:r>
-              <a:rPr sz="4400" b="1" i="0">
+            <a:off x="640080" y="2052828"/>
+            <a:ext cx="10911535" cy="731520"/>
+          </a:xfrm>
+          <a:prstGeom prst="rect">
+            <a:avLst/>
+          </a:prstGeom>
+          <a:noFill/>
+        </p:spPr>
+        <p:txBody>
+          <a:bodyPr wrap="square">
+            <a:spAutoFit/>
+          </a:bodyPr>
+          <a:lstStyle/>
+          <a:p>
+            <a:pPr algn="ctr"/>
+            <a:r>
+              <a:rPr sz="4800" b="1" i="0">
                 <a:solidFill>
                   <a:srgbClr val="FFFFFF"/>
                 </a:solidFill>
@@ -3564,99 +3494,29 @@
         </p:nvSpPr>
         <p:spPr>
           <a:xfrm>
-            <a:off x="594360" y="2980944"/>
-            <a:ext cx="11002975" cy="347472"/>
-          </a:xfrm>
-          <a:prstGeom prst="rect">
-            <a:avLst/>
-          </a:prstGeom>
-          <a:noFill/>
-        </p:spPr>
-        <p:txBody>
-          <a:bodyPr wrap="square">
-            <a:spAutoFit/>
-          </a:bodyPr>
-          <a:lstStyle/>
-          <a:p>
-            <a:pPr algn="ctr"/>
-            <a:r>
-              <a:rPr sz="2200" b="0" i="1">
-                <a:solidFill>
-                  <a:srgbClr val="8C8C8C"/>
-                </a:solidFill>
-                <a:latin typeface="Arial"/>
-              </a:rPr>
-              <a:t/>
-            </a:r>
-          </a:p>
-        </p:txBody>
-      </p:sp>
-      <p:sp>
-        <p:nvSpPr>
-          <p:cNvPr id="4" name="TextBox 3"/>
-          <p:cNvSpPr txBox="1"/>
-          <p:nvPr/>
-        </p:nvSpPr>
-        <p:spPr>
-          <a:xfrm>
-            <a:off x="594360" y="3529584"/>
-            <a:ext cx="11002975" cy="685800"/>
-          </a:xfrm>
-          <a:prstGeom prst="rect">
-            <a:avLst/>
-          </a:prstGeom>
-          <a:noFill/>
-        </p:spPr>
-        <p:txBody>
-          <a:bodyPr wrap="square">
-            <a:spAutoFit/>
-          </a:bodyPr>
-          <a:lstStyle/>
-          <a:p>
-            <a:pPr algn="ctr"/>
-            <a:r>
-              <a:rPr sz="4400" b="1" i="0">
+            <a:off x="640080" y="2985516"/>
+            <a:ext cx="10911535" cy="731520"/>
+          </a:xfrm>
+          <a:prstGeom prst="rect">
+            <a:avLst/>
+          </a:prstGeom>
+          <a:noFill/>
+        </p:spPr>
+        <p:txBody>
+          <a:bodyPr wrap="square">
+            <a:spAutoFit/>
+          </a:bodyPr>
+          <a:lstStyle/>
+          <a:p>
+            <a:pPr algn="ctr"/>
+            <a:r>
+              <a:rPr sz="4800" b="1" i="0">
                 <a:solidFill>
                   <a:srgbClr val="FFFFFF"/>
                 </a:solidFill>
                 <a:latin typeface="Arial"/>
               </a:rPr>
               <a:t>Deus enviou o Seu Filho</a:t>
-            </a:r>
-          </a:p>
-        </p:txBody>
-      </p:sp>
-      <p:sp>
-        <p:nvSpPr>
-          <p:cNvPr id="5" name="TextBox 4"/>
-          <p:cNvSpPr txBox="1"/>
-          <p:nvPr/>
-        </p:nvSpPr>
-        <p:spPr>
-          <a:xfrm>
-            <a:off x="594360" y="4251960"/>
-            <a:ext cx="11002975" cy="347472"/>
-          </a:xfrm>
-          <a:prstGeom prst="rect">
-            <a:avLst/>
-          </a:prstGeom>
-          <a:noFill/>
-        </p:spPr>
-        <p:txBody>
-          <a:bodyPr wrap="square">
-            <a:spAutoFit/>
-          </a:bodyPr>
-          <a:lstStyle/>
-          <a:p>
-            <a:pPr algn="ctr"/>
-            <a:r>
-              <a:rPr sz="2200" b="0" i="1">
-                <a:solidFill>
-                  <a:srgbClr val="8C8C8C"/>
-                </a:solidFill>
-                <a:latin typeface="Arial"/>
-              </a:rPr>
-              <a:t/>
             </a:r>
           </a:p>
         </p:txBody>
@@ -3695,23 +3555,23 @@
         </p:nvSpPr>
         <p:spPr>
           <a:xfrm>
-            <a:off x="594360" y="2258568"/>
-            <a:ext cx="11002975" cy="685800"/>
-          </a:xfrm>
-          <a:prstGeom prst="rect">
-            <a:avLst/>
-          </a:prstGeom>
-          <a:noFill/>
-        </p:spPr>
-        <p:txBody>
-          <a:bodyPr wrap="square">
-            <a:spAutoFit/>
-          </a:bodyPr>
-          <a:lstStyle/>
-          <a:p>
-            <a:pPr algn="ctr"/>
-            <a:r>
-              <a:rPr sz="4400" b="1" i="0">
+            <a:off x="640080" y="2052828"/>
+            <a:ext cx="10911535" cy="731520"/>
+          </a:xfrm>
+          <a:prstGeom prst="rect">
+            <a:avLst/>
+          </a:prstGeom>
+          <a:noFill/>
+        </p:spPr>
+        <p:txBody>
+          <a:bodyPr wrap="square">
+            <a:spAutoFit/>
+          </a:bodyPr>
+          <a:lstStyle/>
+          <a:p>
+            <a:pPr algn="ctr"/>
+            <a:r>
+              <a:rPr sz="4800" b="1" i="0">
                 <a:solidFill>
                   <a:srgbClr val="FFFFFF"/>
                 </a:solidFill>
@@ -3730,99 +3590,29 @@
         </p:nvSpPr>
         <p:spPr>
           <a:xfrm>
-            <a:off x="594360" y="2980944"/>
-            <a:ext cx="11002975" cy="347472"/>
-          </a:xfrm>
-          <a:prstGeom prst="rect">
-            <a:avLst/>
-          </a:prstGeom>
-          <a:noFill/>
-        </p:spPr>
-        <p:txBody>
-          <a:bodyPr wrap="square">
-            <a:spAutoFit/>
-          </a:bodyPr>
-          <a:lstStyle/>
-          <a:p>
-            <a:pPr algn="ctr"/>
-            <a:r>
-              <a:rPr sz="2200" b="0" i="1">
-                <a:solidFill>
-                  <a:srgbClr val="8C8C8C"/>
-                </a:solidFill>
-                <a:latin typeface="Arial"/>
-              </a:rPr>
-              <a:t/>
-            </a:r>
-          </a:p>
-        </p:txBody>
-      </p:sp>
-      <p:sp>
-        <p:nvSpPr>
-          <p:cNvPr id="4" name="TextBox 3"/>
-          <p:cNvSpPr txBox="1"/>
-          <p:nvPr/>
-        </p:nvSpPr>
-        <p:spPr>
-          <a:xfrm>
-            <a:off x="594360" y="3529584"/>
-            <a:ext cx="11002975" cy="685800"/>
-          </a:xfrm>
-          <a:prstGeom prst="rect">
-            <a:avLst/>
-          </a:prstGeom>
-          <a:noFill/>
-        </p:spPr>
-        <p:txBody>
-          <a:bodyPr wrap="square">
-            <a:spAutoFit/>
-          </a:bodyPr>
-          <a:lstStyle/>
-          <a:p>
-            <a:pPr algn="ctr"/>
-            <a:r>
-              <a:rPr sz="4400" b="1" i="0">
+            <a:off x="640080" y="2985516"/>
+            <a:ext cx="10911535" cy="731520"/>
+          </a:xfrm>
+          <a:prstGeom prst="rect">
+            <a:avLst/>
+          </a:prstGeom>
+          <a:noFill/>
+        </p:spPr>
+        <p:txBody>
+          <a:bodyPr wrap="square">
+            <a:spAutoFit/>
+          </a:bodyPr>
+          <a:lstStyle/>
+          <a:p>
+            <a:pPr algn="ctr"/>
+            <a:r>
+              <a:rPr sz="4800" b="1" i="0">
                 <a:solidFill>
                   <a:srgbClr val="FFFFFF"/>
                 </a:solidFill>
                 <a:latin typeface="Arial"/>
               </a:rPr>
               <a:t>Deus enviou o Seu Filho</a:t>
-            </a:r>
-          </a:p>
-        </p:txBody>
-      </p:sp>
-      <p:sp>
-        <p:nvSpPr>
-          <p:cNvPr id="5" name="TextBox 4"/>
-          <p:cNvSpPr txBox="1"/>
-          <p:nvPr/>
-        </p:nvSpPr>
-        <p:spPr>
-          <a:xfrm>
-            <a:off x="594360" y="4251960"/>
-            <a:ext cx="11002975" cy="347472"/>
-          </a:xfrm>
-          <a:prstGeom prst="rect">
-            <a:avLst/>
-          </a:prstGeom>
-          <a:noFill/>
-        </p:spPr>
-        <p:txBody>
-          <a:bodyPr wrap="square">
-            <a:spAutoFit/>
-          </a:bodyPr>
-          <a:lstStyle/>
-          <a:p>
-            <a:pPr algn="ctr"/>
-            <a:r>
-              <a:rPr sz="2200" b="0" i="1">
-                <a:solidFill>
-                  <a:srgbClr val="8C8C8C"/>
-                </a:solidFill>
-                <a:latin typeface="Arial"/>
-              </a:rPr>
-              <a:t/>
             </a:r>
           </a:p>
         </p:txBody>
@@ -3861,23 +3651,23 @@
         </p:nvSpPr>
         <p:spPr>
           <a:xfrm>
-            <a:off x="594360" y="2258568"/>
-            <a:ext cx="11002975" cy="685800"/>
-          </a:xfrm>
-          <a:prstGeom prst="rect">
-            <a:avLst/>
-          </a:prstGeom>
-          <a:noFill/>
-        </p:spPr>
-        <p:txBody>
-          <a:bodyPr wrap="square">
-            <a:spAutoFit/>
-          </a:bodyPr>
-          <a:lstStyle/>
-          <a:p>
-            <a:pPr algn="ctr"/>
-            <a:r>
-              <a:rPr sz="4400" b="1" i="0">
+            <a:off x="640080" y="2052828"/>
+            <a:ext cx="10911535" cy="731520"/>
+          </a:xfrm>
+          <a:prstGeom prst="rect">
+            <a:avLst/>
+          </a:prstGeom>
+          <a:noFill/>
+        </p:spPr>
+        <p:txBody>
+          <a:bodyPr wrap="square">
+            <a:spAutoFit/>
+          </a:bodyPr>
+          <a:lstStyle/>
+          <a:p>
+            <a:pPr algn="ctr"/>
+            <a:r>
+              <a:rPr sz="4800" b="1" i="0">
                 <a:solidFill>
                   <a:srgbClr val="FFFFFF"/>
                 </a:solidFill>
@@ -3896,99 +3686,29 @@
         </p:nvSpPr>
         <p:spPr>
           <a:xfrm>
-            <a:off x="594360" y="2980944"/>
-            <a:ext cx="11002975" cy="347472"/>
-          </a:xfrm>
-          <a:prstGeom prst="rect">
-            <a:avLst/>
-          </a:prstGeom>
-          <a:noFill/>
-        </p:spPr>
-        <p:txBody>
-          <a:bodyPr wrap="square">
-            <a:spAutoFit/>
-          </a:bodyPr>
-          <a:lstStyle/>
-          <a:p>
-            <a:pPr algn="ctr"/>
-            <a:r>
-              <a:rPr sz="2200" b="0" i="1">
-                <a:solidFill>
-                  <a:srgbClr val="8C8C8C"/>
-                </a:solidFill>
-                <a:latin typeface="Arial"/>
-              </a:rPr>
-              <a:t/>
-            </a:r>
-          </a:p>
-        </p:txBody>
-      </p:sp>
-      <p:sp>
-        <p:nvSpPr>
-          <p:cNvPr id="4" name="TextBox 3"/>
-          <p:cNvSpPr txBox="1"/>
-          <p:nvPr/>
-        </p:nvSpPr>
-        <p:spPr>
-          <a:xfrm>
-            <a:off x="594360" y="3529584"/>
-            <a:ext cx="11002975" cy="685800"/>
-          </a:xfrm>
-          <a:prstGeom prst="rect">
-            <a:avLst/>
-          </a:prstGeom>
-          <a:noFill/>
-        </p:spPr>
-        <p:txBody>
-          <a:bodyPr wrap="square">
-            <a:spAutoFit/>
-          </a:bodyPr>
-          <a:lstStyle/>
-          <a:p>
-            <a:pPr algn="ctr"/>
-            <a:r>
-              <a:rPr sz="4400" b="1" i="0">
+            <a:off x="640080" y="2985516"/>
+            <a:ext cx="10911535" cy="731520"/>
+          </a:xfrm>
+          <a:prstGeom prst="rect">
+            <a:avLst/>
+          </a:prstGeom>
+          <a:noFill/>
+        </p:spPr>
+        <p:txBody>
+          <a:bodyPr wrap="square">
+            <a:spAutoFit/>
+          </a:bodyPr>
+          <a:lstStyle/>
+          <a:p>
+            <a:pPr algn="ctr"/>
+            <a:r>
+              <a:rPr sz="4800" b="1" i="0">
                 <a:solidFill>
                   <a:srgbClr val="FFFFFF"/>
                 </a:solidFill>
                 <a:latin typeface="Arial"/>
               </a:rPr>
               <a:t>Deus enviou o Seu Filho</a:t>
-            </a:r>
-          </a:p>
-        </p:txBody>
-      </p:sp>
-      <p:sp>
-        <p:nvSpPr>
-          <p:cNvPr id="5" name="TextBox 4"/>
-          <p:cNvSpPr txBox="1"/>
-          <p:nvPr/>
-        </p:nvSpPr>
-        <p:spPr>
-          <a:xfrm>
-            <a:off x="594360" y="4251960"/>
-            <a:ext cx="11002975" cy="347472"/>
-          </a:xfrm>
-          <a:prstGeom prst="rect">
-            <a:avLst/>
-          </a:prstGeom>
-          <a:noFill/>
-        </p:spPr>
-        <p:txBody>
-          <a:bodyPr wrap="square">
-            <a:spAutoFit/>
-          </a:bodyPr>
-          <a:lstStyle/>
-          <a:p>
-            <a:pPr algn="ctr"/>
-            <a:r>
-              <a:rPr sz="2200" b="0" i="1">
-                <a:solidFill>
-                  <a:srgbClr val="8C8C8C"/>
-                </a:solidFill>
-                <a:latin typeface="Arial"/>
-              </a:rPr>
-              <a:t/>
             </a:r>
           </a:p>
         </p:txBody>
@@ -4027,23 +3747,23 @@
         </p:nvSpPr>
         <p:spPr>
           <a:xfrm>
-            <a:off x="594360" y="1837944"/>
-            <a:ext cx="11002975" cy="685800"/>
-          </a:xfrm>
-          <a:prstGeom prst="rect">
-            <a:avLst/>
-          </a:prstGeom>
-          <a:noFill/>
-        </p:spPr>
-        <p:txBody>
-          <a:bodyPr wrap="square">
-            <a:spAutoFit/>
-          </a:bodyPr>
-          <a:lstStyle/>
-          <a:p>
-            <a:pPr algn="ctr"/>
-            <a:r>
-              <a:rPr sz="4400" b="1" i="0">
+            <a:off x="640080" y="1650492"/>
+            <a:ext cx="10911535" cy="731520"/>
+          </a:xfrm>
+          <a:prstGeom prst="rect">
+            <a:avLst/>
+          </a:prstGeom>
+          <a:noFill/>
+        </p:spPr>
+        <p:txBody>
+          <a:bodyPr wrap="square">
+            <a:spAutoFit/>
+          </a:bodyPr>
+          <a:lstStyle/>
+          <a:p>
+            <a:pPr algn="ctr"/>
+            <a:r>
+              <a:rPr sz="4800" b="1" i="0">
                 <a:solidFill>
                   <a:srgbClr val="FFFFFF"/>
                 </a:solidFill>
@@ -4062,8 +3782,8 @@
         </p:nvSpPr>
         <p:spPr>
           <a:xfrm>
-            <a:off x="594360" y="2560320"/>
-            <a:ext cx="11002975" cy="384048"/>
+            <a:off x="640080" y="2418588"/>
+            <a:ext cx="10911535" cy="365760"/>
           </a:xfrm>
           <a:prstGeom prst="rect">
             <a:avLst/>
@@ -4080,7 +3800,7 @@
             <a:r>
               <a:rPr sz="2400" b="0" i="1">
                 <a:solidFill>
-                  <a:srgbClr val="B4B4B4"/>
+                  <a:srgbClr val="AAAAAA"/>
                 </a:solidFill>
                 <a:latin typeface="Arial"/>
               </a:rPr>
@@ -4097,29 +3817,29 @@
         </p:nvSpPr>
         <p:spPr>
           <a:xfrm>
-            <a:off x="594360" y="2980944"/>
-            <a:ext cx="11002975" cy="347472"/>
-          </a:xfrm>
-          <a:prstGeom prst="rect">
-            <a:avLst/>
-          </a:prstGeom>
-          <a:noFill/>
-        </p:spPr>
-        <p:txBody>
-          <a:bodyPr wrap="square">
-            <a:spAutoFit/>
-          </a:bodyPr>
-          <a:lstStyle/>
-          <a:p>
-            <a:pPr algn="ctr"/>
-            <a:r>
-              <a:rPr sz="2000" b="0" i="1">
-                <a:solidFill>
-                  <a:srgbClr val="8C8C8C"/>
-                </a:solidFill>
-                <a:latin typeface="Arial"/>
-              </a:rPr>
-              <a:t/>
+            <a:off x="640080" y="2985516"/>
+            <a:ext cx="10911535" cy="731520"/>
+          </a:xfrm>
+          <a:prstGeom prst="rect">
+            <a:avLst/>
+          </a:prstGeom>
+          <a:noFill/>
+        </p:spPr>
+        <p:txBody>
+          <a:bodyPr wrap="square">
+            <a:spAutoFit/>
+          </a:bodyPr>
+          <a:lstStyle/>
+          <a:p>
+            <a:pPr algn="ctr"/>
+            <a:r>
+              <a:rPr sz="4800" b="1" i="0">
+                <a:solidFill>
+                  <a:srgbClr val="FFFFFF"/>
+                </a:solidFill>
+                <a:latin typeface="Arial"/>
+              </a:rPr>
+              <a:t>あなたは十字架     否まなかった</a:t>
             </a:r>
           </a:p>
         </p:txBody>
@@ -4132,43 +3852,8 @@
         </p:nvSpPr>
         <p:spPr>
           <a:xfrm>
-            <a:off x="594360" y="3529584"/>
-            <a:ext cx="11002975" cy="685800"/>
-          </a:xfrm>
-          <a:prstGeom prst="rect">
-            <a:avLst/>
-          </a:prstGeom>
-          <a:noFill/>
-        </p:spPr>
-        <p:txBody>
-          <a:bodyPr wrap="square">
-            <a:spAutoFit/>
-          </a:bodyPr>
-          <a:lstStyle/>
-          <a:p>
-            <a:pPr algn="ctr"/>
-            <a:r>
-              <a:rPr sz="4400" b="1" i="0">
-                <a:solidFill>
-                  <a:srgbClr val="FFFFFF"/>
-                </a:solidFill>
-                <a:latin typeface="Arial"/>
-              </a:rPr>
-              <a:t>あなたは十字架     否まなかった</a:t>
-            </a:r>
-          </a:p>
-        </p:txBody>
-      </p:sp>
-      <p:sp>
-        <p:nvSpPr>
-          <p:cNvPr id="6" name="TextBox 5"/>
-          <p:cNvSpPr txBox="1"/>
-          <p:nvPr/>
-        </p:nvSpPr>
-        <p:spPr>
-          <a:xfrm>
-            <a:off x="594360" y="4251960"/>
-            <a:ext cx="11002975" cy="384048"/>
+            <a:off x="640080" y="3753612"/>
+            <a:ext cx="10911535" cy="365760"/>
           </a:xfrm>
           <a:prstGeom prst="rect">
             <a:avLst/>
@@ -4185,46 +3870,11 @@
             <a:r>
               <a:rPr sz="2400" b="0" i="1">
                 <a:solidFill>
-                  <a:srgbClr val="B4B4B4"/>
+                  <a:srgbClr val="AAAAAA"/>
                 </a:solidFill>
                 <a:latin typeface="Arial"/>
               </a:rPr>
               <a:t>anata wajuujika inama na katta</a:t>
-            </a:r>
-          </a:p>
-        </p:txBody>
-      </p:sp>
-      <p:sp>
-        <p:nvSpPr>
-          <p:cNvPr id="7" name="TextBox 6"/>
-          <p:cNvSpPr txBox="1"/>
-          <p:nvPr/>
-        </p:nvSpPr>
-        <p:spPr>
-          <a:xfrm>
-            <a:off x="594360" y="4672584"/>
-            <a:ext cx="11002975" cy="347472"/>
-          </a:xfrm>
-          <a:prstGeom prst="rect">
-            <a:avLst/>
-          </a:prstGeom>
-          <a:noFill/>
-        </p:spPr>
-        <p:txBody>
-          <a:bodyPr wrap="square">
-            <a:spAutoFit/>
-          </a:bodyPr>
-          <a:lstStyle/>
-          <a:p>
-            <a:pPr algn="ctr"/>
-            <a:r>
-              <a:rPr sz="2000" b="0" i="1">
-                <a:solidFill>
-                  <a:srgbClr val="8C8C8C"/>
-                </a:solidFill>
-                <a:latin typeface="Arial"/>
-              </a:rPr>
-              <a:t/>
             </a:r>
           </a:p>
         </p:txBody>
@@ -4263,23 +3913,23 @@
         </p:nvSpPr>
         <p:spPr>
           <a:xfrm>
-            <a:off x="594360" y="1837944"/>
-            <a:ext cx="11002975" cy="685800"/>
-          </a:xfrm>
-          <a:prstGeom prst="rect">
-            <a:avLst/>
-          </a:prstGeom>
-          <a:noFill/>
-        </p:spPr>
-        <p:txBody>
-          <a:bodyPr wrap="square">
-            <a:spAutoFit/>
-          </a:bodyPr>
-          <a:lstStyle/>
-          <a:p>
-            <a:pPr algn="ctr"/>
-            <a:r>
-              <a:rPr sz="4400" b="1" i="0">
+            <a:off x="640080" y="1650492"/>
+            <a:ext cx="10911535" cy="731520"/>
+          </a:xfrm>
+          <a:prstGeom prst="rect">
+            <a:avLst/>
+          </a:prstGeom>
+          <a:noFill/>
+        </p:spPr>
+        <p:txBody>
+          <a:bodyPr wrap="square">
+            <a:spAutoFit/>
+          </a:bodyPr>
+          <a:lstStyle/>
+          <a:p>
+            <a:pPr algn="ctr"/>
+            <a:r>
+              <a:rPr sz="4800" b="1" i="0">
                 <a:solidFill>
                   <a:srgbClr val="FFFFFF"/>
                 </a:solidFill>
@@ -4298,8 +3948,8 @@
         </p:nvSpPr>
         <p:spPr>
           <a:xfrm>
-            <a:off x="594360" y="2560320"/>
-            <a:ext cx="11002975" cy="384048"/>
+            <a:off x="640080" y="2418588"/>
+            <a:ext cx="10911535" cy="365760"/>
           </a:xfrm>
           <a:prstGeom prst="rect">
             <a:avLst/>
@@ -4316,7 +3966,7 @@
             <a:r>
               <a:rPr sz="2400" b="0" i="1">
                 <a:solidFill>
-                  <a:srgbClr val="B4B4B4"/>
+                  <a:srgbClr val="AAAAAA"/>
                 </a:solidFill>
                 <a:latin typeface="Arial"/>
               </a:rPr>
@@ -4333,29 +3983,29 @@
         </p:nvSpPr>
         <p:spPr>
           <a:xfrm>
-            <a:off x="594360" y="2980944"/>
-            <a:ext cx="11002975" cy="347472"/>
-          </a:xfrm>
-          <a:prstGeom prst="rect">
-            <a:avLst/>
-          </a:prstGeom>
-          <a:noFill/>
-        </p:spPr>
-        <p:txBody>
-          <a:bodyPr wrap="square">
-            <a:spAutoFit/>
-          </a:bodyPr>
-          <a:lstStyle/>
-          <a:p>
-            <a:pPr algn="ctr"/>
-            <a:r>
-              <a:rPr sz="2000" b="0" i="1">
-                <a:solidFill>
-                  <a:srgbClr val="8C8C8C"/>
-                </a:solidFill>
-                <a:latin typeface="Arial"/>
-              </a:rPr>
-              <a:t/>
+            <a:off x="640080" y="2985516"/>
+            <a:ext cx="10911535" cy="731520"/>
+          </a:xfrm>
+          <a:prstGeom prst="rect">
+            <a:avLst/>
+          </a:prstGeom>
+          <a:noFill/>
+        </p:spPr>
+        <p:txBody>
+          <a:bodyPr wrap="square">
+            <a:spAutoFit/>
+          </a:bodyPr>
+          <a:lstStyle/>
+          <a:p>
+            <a:pPr algn="ctr"/>
+            <a:r>
+              <a:rPr sz="4800" b="1" i="0">
+                <a:solidFill>
+                  <a:srgbClr val="FFFFFF"/>
+                </a:solidFill>
+                <a:latin typeface="Arial"/>
+              </a:rPr>
+              <a:t>我ら救うため    イエスは死なれた</a:t>
             </a:r>
           </a:p>
         </p:txBody>
@@ -4368,43 +4018,8 @@
         </p:nvSpPr>
         <p:spPr>
           <a:xfrm>
-            <a:off x="594360" y="3529584"/>
-            <a:ext cx="11002975" cy="685800"/>
-          </a:xfrm>
-          <a:prstGeom prst="rect">
-            <a:avLst/>
-          </a:prstGeom>
-          <a:noFill/>
-        </p:spPr>
-        <p:txBody>
-          <a:bodyPr wrap="square">
-            <a:spAutoFit/>
-          </a:bodyPr>
-          <a:lstStyle/>
-          <a:p>
-            <a:pPr algn="ctr"/>
-            <a:r>
-              <a:rPr sz="4400" b="1" i="0">
-                <a:solidFill>
-                  <a:srgbClr val="FFFFFF"/>
-                </a:solidFill>
-                <a:latin typeface="Arial"/>
-              </a:rPr>
-              <a:t>我ら救うため    イエスは死なれた</a:t>
-            </a:r>
-          </a:p>
-        </p:txBody>
-      </p:sp>
-      <p:sp>
-        <p:nvSpPr>
-          <p:cNvPr id="6" name="TextBox 5"/>
-          <p:cNvSpPr txBox="1"/>
-          <p:nvPr/>
-        </p:nvSpPr>
-        <p:spPr>
-          <a:xfrm>
-            <a:off x="594360" y="4251960"/>
-            <a:ext cx="11002975" cy="384048"/>
+            <a:off x="640080" y="3753612"/>
+            <a:ext cx="10911535" cy="365760"/>
           </a:xfrm>
           <a:prstGeom prst="rect">
             <a:avLst/>
@@ -4421,46 +4036,11 @@
             <a:r>
               <a:rPr sz="2400" b="0" i="1">
                 <a:solidFill>
-                  <a:srgbClr val="B4B4B4"/>
+                  <a:srgbClr val="AAAAAA"/>
                 </a:solidFill>
                 <a:latin typeface="Arial"/>
               </a:rPr>
               <a:t>warerasukuu tame iesu wa shinareta</a:t>
-            </a:r>
-          </a:p>
-        </p:txBody>
-      </p:sp>
-      <p:sp>
-        <p:nvSpPr>
-          <p:cNvPr id="7" name="TextBox 6"/>
-          <p:cNvSpPr txBox="1"/>
-          <p:nvPr/>
-        </p:nvSpPr>
-        <p:spPr>
-          <a:xfrm>
-            <a:off x="594360" y="4672584"/>
-            <a:ext cx="11002975" cy="347472"/>
-          </a:xfrm>
-          <a:prstGeom prst="rect">
-            <a:avLst/>
-          </a:prstGeom>
-          <a:noFill/>
-        </p:spPr>
-        <p:txBody>
-          <a:bodyPr wrap="square">
-            <a:spAutoFit/>
-          </a:bodyPr>
-          <a:lstStyle/>
-          <a:p>
-            <a:pPr algn="ctr"/>
-            <a:r>
-              <a:rPr sz="2000" b="0" i="1">
-                <a:solidFill>
-                  <a:srgbClr val="8C8C8C"/>
-                </a:solidFill>
-                <a:latin typeface="Arial"/>
-              </a:rPr>
-              <a:t/>
             </a:r>
           </a:p>
         </p:txBody>
@@ -4499,23 +4079,23 @@
         </p:nvSpPr>
         <p:spPr>
           <a:xfrm>
-            <a:off x="594360" y="1837944"/>
-            <a:ext cx="11002975" cy="685800"/>
-          </a:xfrm>
-          <a:prstGeom prst="rect">
-            <a:avLst/>
-          </a:prstGeom>
-          <a:noFill/>
-        </p:spPr>
-        <p:txBody>
-          <a:bodyPr wrap="square">
-            <a:spAutoFit/>
-          </a:bodyPr>
-          <a:lstStyle/>
-          <a:p>
-            <a:pPr algn="ctr"/>
-            <a:r>
-              <a:rPr sz="4400" b="1" i="0">
+            <a:off x="640080" y="1650492"/>
+            <a:ext cx="10911535" cy="731520"/>
+          </a:xfrm>
+          <a:prstGeom prst="rect">
+            <a:avLst/>
+          </a:prstGeom>
+          <a:noFill/>
+        </p:spPr>
+        <p:txBody>
+          <a:bodyPr wrap="square">
+            <a:spAutoFit/>
+          </a:bodyPr>
+          <a:lstStyle/>
+          <a:p>
+            <a:pPr algn="ctr"/>
+            <a:r>
+              <a:rPr sz="4800" b="1" i="0">
                 <a:solidFill>
                   <a:srgbClr val="FFFFFF"/>
                 </a:solidFill>
@@ -4534,8 +4114,8 @@
         </p:nvSpPr>
         <p:spPr>
           <a:xfrm>
-            <a:off x="594360" y="2560320"/>
-            <a:ext cx="11002975" cy="384048"/>
+            <a:off x="640080" y="2418588"/>
+            <a:ext cx="10911535" cy="365760"/>
           </a:xfrm>
           <a:prstGeom prst="rect">
             <a:avLst/>
@@ -4552,7 +4132,7 @@
             <a:r>
               <a:rPr sz="2400" b="0" i="1">
                 <a:solidFill>
-                  <a:srgbClr val="B4B4B4"/>
+                  <a:srgbClr val="AAAAAA"/>
                 </a:solidFill>
                 <a:latin typeface="Arial"/>
               </a:rPr>
@@ -4569,8 +4149,78 @@
         </p:nvSpPr>
         <p:spPr>
           <a:xfrm>
-            <a:off x="594360" y="2980944"/>
-            <a:ext cx="11002975" cy="347472"/>
+            <a:off x="640080" y="2985516"/>
+            <a:ext cx="10911535" cy="731520"/>
+          </a:xfrm>
+          <a:prstGeom prst="rect">
+            <a:avLst/>
+          </a:prstGeom>
+          <a:noFill/>
+        </p:spPr>
+        <p:txBody>
+          <a:bodyPr wrap="square">
+            <a:spAutoFit/>
+          </a:bodyPr>
+          <a:lstStyle/>
+          <a:p>
+            <a:pPr algn="ctr"/>
+            <a:r>
+              <a:rPr sz="4800" b="1" i="0">
+                <a:solidFill>
+                  <a:srgbClr val="FFFFFF"/>
+                </a:solidFill>
+                <a:latin typeface="Arial"/>
+              </a:rPr>
+              <a:t>永遠(とわ)に讃える 栄光の王の王</a:t>
+            </a:r>
+          </a:p>
+        </p:txBody>
+      </p:sp>
+      <p:sp>
+        <p:nvSpPr>
+          <p:cNvPr id="5" name="TextBox 4"/>
+          <p:cNvSpPr txBox="1"/>
+          <p:nvPr/>
+        </p:nvSpPr>
+        <p:spPr>
+          <a:xfrm>
+            <a:off x="640080" y="3753612"/>
+            <a:ext cx="10911535" cy="365760"/>
+          </a:xfrm>
+          <a:prstGeom prst="rect">
+            <a:avLst/>
+          </a:prstGeom>
+          <a:noFill/>
+        </p:spPr>
+        <p:txBody>
+          <a:bodyPr wrap="square">
+            <a:spAutoFit/>
+          </a:bodyPr>
+          <a:lstStyle/>
+          <a:p>
+            <a:pPr algn="ctr"/>
+            <a:r>
+              <a:rPr sz="2400" b="0" i="1">
+                <a:solidFill>
+                  <a:srgbClr val="AAAAAA"/>
+                </a:solidFill>
+                <a:latin typeface="Arial"/>
+              </a:rPr>
+              <a:t>towanitataeru   eikou no ou no ou</a:t>
+            </a:r>
+          </a:p>
+        </p:txBody>
+      </p:sp>
+      <p:sp>
+        <p:nvSpPr>
+          <p:cNvPr id="6" name="TextBox 5"/>
+          <p:cNvSpPr txBox="1"/>
+          <p:nvPr/>
+        </p:nvSpPr>
+        <p:spPr>
+          <a:xfrm>
+            <a:off x="640080" y="4530852"/>
+            <a:ext cx="10911535" cy="310896"/>
           </a:xfrm>
           <a:prstGeom prst="rect">
             <a:avLst/>
@@ -4587,7 +4237,7 @@
             <a:r>
               <a:rPr sz="2000" b="0" i="1">
                 <a:solidFill>
-                  <a:srgbClr val="8C8C8C"/>
+                  <a:srgbClr val="828282"/>
                 </a:solidFill>
                 <a:latin typeface="Arial"/>
               </a:rPr>
@@ -4598,84 +4248,14 @@
       </p:sp>
       <p:sp>
         <p:nvSpPr>
-          <p:cNvPr id="5" name="TextBox 4"/>
-          <p:cNvSpPr txBox="1"/>
-          <p:nvPr/>
-        </p:nvSpPr>
-        <p:spPr>
-          <a:xfrm>
-            <a:off x="594360" y="3529584"/>
-            <a:ext cx="11002975" cy="685800"/>
-          </a:xfrm>
-          <a:prstGeom prst="rect">
-            <a:avLst/>
-          </a:prstGeom>
-          <a:noFill/>
-        </p:spPr>
-        <p:txBody>
-          <a:bodyPr wrap="square">
-            <a:spAutoFit/>
-          </a:bodyPr>
-          <a:lstStyle/>
-          <a:p>
-            <a:pPr algn="ctr"/>
-            <a:r>
-              <a:rPr sz="4400" b="1" i="0">
-                <a:solidFill>
-                  <a:srgbClr val="FFFFFF"/>
-                </a:solidFill>
-                <a:latin typeface="Arial"/>
-              </a:rPr>
-              <a:t>永遠(とわ)に讃える 栄光の王の王</a:t>
-            </a:r>
-          </a:p>
-        </p:txBody>
-      </p:sp>
-      <p:sp>
-        <p:nvSpPr>
-          <p:cNvPr id="6" name="TextBox 5"/>
-          <p:cNvSpPr txBox="1"/>
-          <p:nvPr/>
-        </p:nvSpPr>
-        <p:spPr>
-          <a:xfrm>
-            <a:off x="594360" y="4251960"/>
-            <a:ext cx="11002975" cy="384048"/>
-          </a:xfrm>
-          <a:prstGeom prst="rect">
-            <a:avLst/>
-          </a:prstGeom>
-          <a:noFill/>
-        </p:spPr>
-        <p:txBody>
-          <a:bodyPr wrap="square">
-            <a:spAutoFit/>
-          </a:bodyPr>
-          <a:lstStyle/>
-          <a:p>
-            <a:pPr algn="ctr"/>
-            <a:r>
-              <a:rPr sz="2400" b="0" i="1">
-                <a:solidFill>
-                  <a:srgbClr val="B4B4B4"/>
-                </a:solidFill>
-                <a:latin typeface="Arial"/>
-              </a:rPr>
-              <a:t>towanitataeru   eikou no ou no ou</a:t>
-            </a:r>
-          </a:p>
-        </p:txBody>
-      </p:sp>
-      <p:sp>
-        <p:nvSpPr>
           <p:cNvPr id="7" name="TextBox 6"/>
           <p:cNvSpPr txBox="1"/>
           <p:nvPr/>
         </p:nvSpPr>
         <p:spPr>
           <a:xfrm>
-            <a:off x="594360" y="4672584"/>
-            <a:ext cx="11002975" cy="347472"/>
+            <a:off x="640080" y="4896612"/>
+            <a:ext cx="10911535" cy="310896"/>
           </a:xfrm>
           <a:prstGeom prst="rect">
             <a:avLst/>
@@ -4692,7 +4272,7 @@
             <a:r>
               <a:rPr sz="2000" b="0" i="1">
                 <a:solidFill>
-                  <a:srgbClr val="8C8C8C"/>
+                  <a:srgbClr val="828282"/>
                 </a:solidFill>
                 <a:latin typeface="Arial"/>
               </a:rPr>
@@ -4735,23 +4315,23 @@
         </p:nvSpPr>
         <p:spPr>
           <a:xfrm>
-            <a:off x="594360" y="1837944"/>
-            <a:ext cx="11002975" cy="685800"/>
-          </a:xfrm>
-          <a:prstGeom prst="rect">
-            <a:avLst/>
-          </a:prstGeom>
-          <a:noFill/>
-        </p:spPr>
-        <p:txBody>
-          <a:bodyPr wrap="square">
-            <a:spAutoFit/>
-          </a:bodyPr>
-          <a:lstStyle/>
-          <a:p>
-            <a:pPr algn="ctr"/>
-            <a:r>
-              <a:rPr sz="4400" b="1" i="0">
+            <a:off x="640080" y="1650492"/>
+            <a:ext cx="10911535" cy="731520"/>
+          </a:xfrm>
+          <a:prstGeom prst="rect">
+            <a:avLst/>
+          </a:prstGeom>
+          <a:noFill/>
+        </p:spPr>
+        <p:txBody>
+          <a:bodyPr wrap="square">
+            <a:spAutoFit/>
+          </a:bodyPr>
+          <a:lstStyle/>
+          <a:p>
+            <a:pPr algn="ctr"/>
+            <a:r>
+              <a:rPr sz="4800" b="1" i="0">
                 <a:solidFill>
                   <a:srgbClr val="FFFFFF"/>
                 </a:solidFill>
@@ -4770,8 +4350,8 @@
         </p:nvSpPr>
         <p:spPr>
           <a:xfrm>
-            <a:off x="594360" y="2560320"/>
-            <a:ext cx="11002975" cy="384048"/>
+            <a:off x="640080" y="2418588"/>
+            <a:ext cx="10911535" cy="365760"/>
           </a:xfrm>
           <a:prstGeom prst="rect">
             <a:avLst/>
@@ -4788,7 +4368,7 @@
             <a:r>
               <a:rPr sz="2400" b="0" i="1">
                 <a:solidFill>
-                  <a:srgbClr val="B4B4B4"/>
+                  <a:srgbClr val="AAAAAA"/>
                 </a:solidFill>
                 <a:latin typeface="Arial"/>
               </a:rPr>
@@ -4805,29 +4385,29 @@
         </p:nvSpPr>
         <p:spPr>
           <a:xfrm>
-            <a:off x="594360" y="2980944"/>
-            <a:ext cx="11002975" cy="347472"/>
-          </a:xfrm>
-          <a:prstGeom prst="rect">
-            <a:avLst/>
-          </a:prstGeom>
-          <a:noFill/>
-        </p:spPr>
-        <p:txBody>
-          <a:bodyPr wrap="square">
-            <a:spAutoFit/>
-          </a:bodyPr>
-          <a:lstStyle/>
-          <a:p>
-            <a:pPr algn="ctr"/>
-            <a:r>
-              <a:rPr sz="2000" b="0" i="1">
-                <a:solidFill>
-                  <a:srgbClr val="8C8C8C"/>
-                </a:solidFill>
-                <a:latin typeface="Arial"/>
-              </a:rPr>
-              <a:t/>
+            <a:off x="640080" y="2985516"/>
+            <a:ext cx="10911535" cy="731520"/>
+          </a:xfrm>
+          <a:prstGeom prst="rect">
+            <a:avLst/>
+          </a:prstGeom>
+          <a:noFill/>
+        </p:spPr>
+        <p:txBody>
+          <a:bodyPr wrap="square">
+            <a:spAutoFit/>
+          </a:bodyPr>
+          <a:lstStyle/>
+          <a:p>
+            <a:pPr algn="ctr"/>
+            <a:r>
+              <a:rPr sz="4800" b="1" i="0">
+                <a:solidFill>
+                  <a:srgbClr val="FFFFFF"/>
+                </a:solidFill>
+                <a:latin typeface="Arial"/>
+              </a:rPr>
+              <a:t>子羊は死を         打ち破られた</a:t>
             </a:r>
           </a:p>
         </p:txBody>
@@ -4840,43 +4420,8 @@
         </p:nvSpPr>
         <p:spPr>
           <a:xfrm>
-            <a:off x="594360" y="3529584"/>
-            <a:ext cx="11002975" cy="685800"/>
-          </a:xfrm>
-          <a:prstGeom prst="rect">
-            <a:avLst/>
-          </a:prstGeom>
-          <a:noFill/>
-        </p:spPr>
-        <p:txBody>
-          <a:bodyPr wrap="square">
-            <a:spAutoFit/>
-          </a:bodyPr>
-          <a:lstStyle/>
-          <a:p>
-            <a:pPr algn="ctr"/>
-            <a:r>
-              <a:rPr sz="4400" b="1" i="0">
-                <a:solidFill>
-                  <a:srgbClr val="FFFFFF"/>
-                </a:solidFill>
-                <a:latin typeface="Arial"/>
-              </a:rPr>
-              <a:t>子羊は死を         打ち破られた</a:t>
-            </a:r>
-          </a:p>
-        </p:txBody>
-      </p:sp>
-      <p:sp>
-        <p:nvSpPr>
-          <p:cNvPr id="6" name="TextBox 5"/>
-          <p:cNvSpPr txBox="1"/>
-          <p:nvPr/>
-        </p:nvSpPr>
-        <p:spPr>
-          <a:xfrm>
-            <a:off x="594360" y="4251960"/>
-            <a:ext cx="11002975" cy="384048"/>
+            <a:off x="640080" y="3753612"/>
+            <a:ext cx="10911535" cy="365760"/>
           </a:xfrm>
           <a:prstGeom prst="rect">
             <a:avLst/>
@@ -4893,46 +4438,11 @@
             <a:r>
               <a:rPr sz="2400" b="0" i="1">
                 <a:solidFill>
-                  <a:srgbClr val="B4B4B4"/>
+                  <a:srgbClr val="AAAAAA"/>
                 </a:solidFill>
                 <a:latin typeface="Arial"/>
               </a:rPr>
               <a:t>kohituji wa shiwo uchi yaburareta</a:t>
-            </a:r>
-          </a:p>
-        </p:txBody>
-      </p:sp>
-      <p:sp>
-        <p:nvSpPr>
-          <p:cNvPr id="7" name="TextBox 6"/>
-          <p:cNvSpPr txBox="1"/>
-          <p:nvPr/>
-        </p:nvSpPr>
-        <p:spPr>
-          <a:xfrm>
-            <a:off x="594360" y="4672584"/>
-            <a:ext cx="11002975" cy="347472"/>
-          </a:xfrm>
-          <a:prstGeom prst="rect">
-            <a:avLst/>
-          </a:prstGeom>
-          <a:noFill/>
-        </p:spPr>
-        <p:txBody>
-          <a:bodyPr wrap="square">
-            <a:spAutoFit/>
-          </a:bodyPr>
-          <a:lstStyle/>
-          <a:p>
-            <a:pPr algn="ctr"/>
-            <a:r>
-              <a:rPr sz="2000" b="0" i="1">
-                <a:solidFill>
-                  <a:srgbClr val="8C8C8C"/>
-                </a:solidFill>
-                <a:latin typeface="Arial"/>
-              </a:rPr>
-              <a:t/>
             </a:r>
           </a:p>
         </p:txBody>
@@ -4971,23 +4481,23 @@
         </p:nvSpPr>
         <p:spPr>
           <a:xfrm>
-            <a:off x="594360" y="1837944"/>
-            <a:ext cx="11002975" cy="685800"/>
-          </a:xfrm>
-          <a:prstGeom prst="rect">
-            <a:avLst/>
-          </a:prstGeom>
-          <a:noFill/>
-        </p:spPr>
-        <p:txBody>
-          <a:bodyPr wrap="square">
-            <a:spAutoFit/>
-          </a:bodyPr>
-          <a:lstStyle/>
-          <a:p>
-            <a:pPr algn="ctr"/>
-            <a:r>
-              <a:rPr sz="4400" b="1" i="0">
+            <a:off x="640080" y="1650492"/>
+            <a:ext cx="10911535" cy="731520"/>
+          </a:xfrm>
+          <a:prstGeom prst="rect">
+            <a:avLst/>
+          </a:prstGeom>
+          <a:noFill/>
+        </p:spPr>
+        <p:txBody>
+          <a:bodyPr wrap="square">
+            <a:spAutoFit/>
+          </a:bodyPr>
+          <a:lstStyle/>
+          <a:p>
+            <a:pPr algn="ctr"/>
+            <a:r>
+              <a:rPr sz="4800" b="1" i="0">
                 <a:solidFill>
                   <a:srgbClr val="FFFFFF"/>
                 </a:solidFill>
@@ -5006,8 +4516,8 @@
         </p:nvSpPr>
         <p:spPr>
           <a:xfrm>
-            <a:off x="594360" y="2560320"/>
-            <a:ext cx="11002975" cy="384048"/>
+            <a:off x="640080" y="2418588"/>
+            <a:ext cx="10911535" cy="365760"/>
           </a:xfrm>
           <a:prstGeom prst="rect">
             <a:avLst/>
@@ -5024,7 +4534,7 @@
             <a:r>
               <a:rPr sz="2400" b="0" i="1">
                 <a:solidFill>
-                  <a:srgbClr val="B4B4B4"/>
+                  <a:srgbClr val="AAAAAA"/>
                 </a:solidFill>
                 <a:latin typeface="Arial"/>
               </a:rPr>
@@ -5041,29 +4551,29 @@
         </p:nvSpPr>
         <p:spPr>
           <a:xfrm>
-            <a:off x="594360" y="2980944"/>
-            <a:ext cx="11002975" cy="347472"/>
-          </a:xfrm>
-          <a:prstGeom prst="rect">
-            <a:avLst/>
-          </a:prstGeom>
-          <a:noFill/>
-        </p:spPr>
-        <p:txBody>
-          <a:bodyPr wrap="square">
-            <a:spAutoFit/>
-          </a:bodyPr>
-          <a:lstStyle/>
-          <a:p>
-            <a:pPr algn="ctr"/>
-            <a:r>
-              <a:rPr sz="2000" b="0" i="1">
-                <a:solidFill>
-                  <a:srgbClr val="8C8C8C"/>
-                </a:solidFill>
-                <a:latin typeface="Arial"/>
-              </a:rPr>
-              <a:t/>
+            <a:off x="640080" y="2985516"/>
+            <a:ext cx="10911535" cy="731520"/>
+          </a:xfrm>
+          <a:prstGeom prst="rect">
+            <a:avLst/>
+          </a:prstGeom>
+          <a:noFill/>
+        </p:spPr>
+        <p:txBody>
+          <a:bodyPr wrap="square">
+            <a:spAutoFit/>
+          </a:bodyPr>
+          <a:lstStyle/>
+          <a:p>
+            <a:pPr algn="ctr"/>
+            <a:r>
+              <a:rPr sz="4800" b="1" i="0">
+                <a:solidFill>
+                  <a:srgbClr val="FFFFFF"/>
+                </a:solidFill>
+                <a:latin typeface="Arial"/>
+              </a:rPr>
+              <a:t>父のもと帰り      安らぎを得る</a:t>
             </a:r>
           </a:p>
         </p:txBody>
@@ -5076,43 +4586,8 @@
         </p:nvSpPr>
         <p:spPr>
           <a:xfrm>
-            <a:off x="594360" y="3529584"/>
-            <a:ext cx="11002975" cy="685800"/>
-          </a:xfrm>
-          <a:prstGeom prst="rect">
-            <a:avLst/>
-          </a:prstGeom>
-          <a:noFill/>
-        </p:spPr>
-        <p:txBody>
-          <a:bodyPr wrap="square">
-            <a:spAutoFit/>
-          </a:bodyPr>
-          <a:lstStyle/>
-          <a:p>
-            <a:pPr algn="ctr"/>
-            <a:r>
-              <a:rPr sz="4400" b="1" i="0">
-                <a:solidFill>
-                  <a:srgbClr val="FFFFFF"/>
-                </a:solidFill>
-                <a:latin typeface="Arial"/>
-              </a:rPr>
-              <a:t>父のもと帰り      安らぎを得る</a:t>
-            </a:r>
-          </a:p>
-        </p:txBody>
-      </p:sp>
-      <p:sp>
-        <p:nvSpPr>
-          <p:cNvPr id="6" name="TextBox 5"/>
-          <p:cNvSpPr txBox="1"/>
-          <p:nvPr/>
-        </p:nvSpPr>
-        <p:spPr>
-          <a:xfrm>
-            <a:off x="594360" y="4251960"/>
-            <a:ext cx="11002975" cy="384048"/>
+            <a:off x="640080" y="3753612"/>
+            <a:ext cx="10911535" cy="365760"/>
           </a:xfrm>
           <a:prstGeom prst="rect">
             <a:avLst/>
@@ -5129,46 +4604,11 @@
             <a:r>
               <a:rPr sz="2400" b="0" i="1">
                 <a:solidFill>
-                  <a:srgbClr val="B4B4B4"/>
+                  <a:srgbClr val="AAAAAA"/>
                 </a:solidFill>
                 <a:latin typeface="Arial"/>
               </a:rPr>
               <a:t>chichino moto kaeri yasuragi wo eru</a:t>
-            </a:r>
-          </a:p>
-        </p:txBody>
-      </p:sp>
-      <p:sp>
-        <p:nvSpPr>
-          <p:cNvPr id="7" name="TextBox 6"/>
-          <p:cNvSpPr txBox="1"/>
-          <p:nvPr/>
-        </p:nvSpPr>
-        <p:spPr>
-          <a:xfrm>
-            <a:off x="594360" y="4672584"/>
-            <a:ext cx="11002975" cy="347472"/>
-          </a:xfrm>
-          <a:prstGeom prst="rect">
-            <a:avLst/>
-          </a:prstGeom>
-          <a:noFill/>
-        </p:spPr>
-        <p:txBody>
-          <a:bodyPr wrap="square">
-            <a:spAutoFit/>
-          </a:bodyPr>
-          <a:lstStyle/>
-          <a:p>
-            <a:pPr algn="ctr"/>
-            <a:r>
-              <a:rPr sz="2000" b="0" i="1">
-                <a:solidFill>
-                  <a:srgbClr val="8C8C8C"/>
-                </a:solidFill>
-                <a:latin typeface="Arial"/>
-              </a:rPr>
-              <a:t/>
             </a:r>
           </a:p>
         </p:txBody>
@@ -5207,23 +4647,23 @@
         </p:nvSpPr>
         <p:spPr>
           <a:xfrm>
-            <a:off x="594360" y="1837944"/>
-            <a:ext cx="11002975" cy="685800"/>
-          </a:xfrm>
-          <a:prstGeom prst="rect">
-            <a:avLst/>
-          </a:prstGeom>
-          <a:noFill/>
-        </p:spPr>
-        <p:txBody>
-          <a:bodyPr wrap="square">
-            <a:spAutoFit/>
-          </a:bodyPr>
-          <a:lstStyle/>
-          <a:p>
-            <a:pPr algn="ctr"/>
-            <a:r>
-              <a:rPr sz="4400" b="1" i="0">
+            <a:off x="640080" y="1650492"/>
+            <a:ext cx="10911535" cy="731520"/>
+          </a:xfrm>
+          <a:prstGeom prst="rect">
+            <a:avLst/>
+          </a:prstGeom>
+          <a:noFill/>
+        </p:spPr>
+        <p:txBody>
+          <a:bodyPr wrap="square">
+            <a:spAutoFit/>
+          </a:bodyPr>
+          <a:lstStyle/>
+          <a:p>
+            <a:pPr algn="ctr"/>
+            <a:r>
+              <a:rPr sz="4800" b="1" i="0">
                 <a:solidFill>
                   <a:srgbClr val="FFFFFF"/>
                 </a:solidFill>
@@ -5242,8 +4682,8 @@
         </p:nvSpPr>
         <p:spPr>
           <a:xfrm>
-            <a:off x="594360" y="2560320"/>
-            <a:ext cx="11002975" cy="384048"/>
+            <a:off x="640080" y="2418588"/>
+            <a:ext cx="10911535" cy="365760"/>
           </a:xfrm>
           <a:prstGeom prst="rect">
             <a:avLst/>
@@ -5260,7 +4700,7 @@
             <a:r>
               <a:rPr sz="2400" b="0" i="1">
                 <a:solidFill>
-                  <a:srgbClr val="B4B4B4"/>
+                  <a:srgbClr val="AAAAAA"/>
                 </a:solidFill>
                 <a:latin typeface="Arial"/>
               </a:rPr>
@@ -5277,29 +4717,29 @@
         </p:nvSpPr>
         <p:spPr>
           <a:xfrm>
-            <a:off x="594360" y="2980944"/>
-            <a:ext cx="11002975" cy="347472"/>
-          </a:xfrm>
-          <a:prstGeom prst="rect">
-            <a:avLst/>
-          </a:prstGeom>
-          <a:noFill/>
-        </p:spPr>
-        <p:txBody>
-          <a:bodyPr wrap="square">
-            <a:spAutoFit/>
-          </a:bodyPr>
-          <a:lstStyle/>
-          <a:p>
-            <a:pPr algn="ctr"/>
-            <a:r>
-              <a:rPr sz="2000" b="0" i="1">
-                <a:solidFill>
-                  <a:srgbClr val="8C8C8C"/>
-                </a:solidFill>
-                <a:latin typeface="Arial"/>
-              </a:rPr>
-              <a:t/>
+            <a:off x="640080" y="2985516"/>
+            <a:ext cx="10911535" cy="731520"/>
+          </a:xfrm>
+          <a:prstGeom prst="rect">
+            <a:avLst/>
+          </a:prstGeom>
+          <a:noFill/>
+        </p:spPr>
+        <p:txBody>
+          <a:bodyPr wrap="square">
+            <a:spAutoFit/>
+          </a:bodyPr>
+          <a:lstStyle/>
+          <a:p>
+            <a:pPr algn="ctr"/>
+            <a:r>
+              <a:rPr sz="4800" b="1" i="0">
+                <a:solidFill>
+                  <a:srgbClr val="FFFFFF"/>
+                </a:solidFill>
+                <a:latin typeface="Arial"/>
+              </a:rPr>
+              <a:t>今も福音        強く 輝く</a:t>
             </a:r>
           </a:p>
         </p:txBody>
@@ -5312,43 +4752,8 @@
         </p:nvSpPr>
         <p:spPr>
           <a:xfrm>
-            <a:off x="594360" y="3529584"/>
-            <a:ext cx="11002975" cy="685800"/>
-          </a:xfrm>
-          <a:prstGeom prst="rect">
-            <a:avLst/>
-          </a:prstGeom>
-          <a:noFill/>
-        </p:spPr>
-        <p:txBody>
-          <a:bodyPr wrap="square">
-            <a:spAutoFit/>
-          </a:bodyPr>
-          <a:lstStyle/>
-          <a:p>
-            <a:pPr algn="ctr"/>
-            <a:r>
-              <a:rPr sz="4400" b="1" i="0">
-                <a:solidFill>
-                  <a:srgbClr val="FFFFFF"/>
-                </a:solidFill>
-                <a:latin typeface="Arial"/>
-              </a:rPr>
-              <a:t>今も福音        強く 輝く</a:t>
-            </a:r>
-          </a:p>
-        </p:txBody>
-      </p:sp>
-      <p:sp>
-        <p:nvSpPr>
-          <p:cNvPr id="6" name="TextBox 5"/>
-          <p:cNvSpPr txBox="1"/>
-          <p:nvPr/>
-        </p:nvSpPr>
-        <p:spPr>
-          <a:xfrm>
-            <a:off x="594360" y="4251960"/>
-            <a:ext cx="11002975" cy="384048"/>
+            <a:off x="640080" y="3753612"/>
+            <a:ext cx="10911535" cy="365760"/>
           </a:xfrm>
           <a:prstGeom prst="rect">
             <a:avLst/>
@@ -5365,46 +4770,11 @@
             <a:r>
               <a:rPr sz="2400" b="0" i="1">
                 <a:solidFill>
-                  <a:srgbClr val="B4B4B4"/>
+                  <a:srgbClr val="AAAAAA"/>
                 </a:solidFill>
                 <a:latin typeface="Arial"/>
               </a:rPr>
               <a:t>ima mo hukuin  tsuyoku kagayaku</a:t>
-            </a:r>
-          </a:p>
-        </p:txBody>
-      </p:sp>
-      <p:sp>
-        <p:nvSpPr>
-          <p:cNvPr id="7" name="TextBox 6"/>
-          <p:cNvSpPr txBox="1"/>
-          <p:nvPr/>
-        </p:nvSpPr>
-        <p:spPr>
-          <a:xfrm>
-            <a:off x="594360" y="4672584"/>
-            <a:ext cx="11002975" cy="347472"/>
-          </a:xfrm>
-          <a:prstGeom prst="rect">
-            <a:avLst/>
-          </a:prstGeom>
-          <a:noFill/>
-        </p:spPr>
-        <p:txBody>
-          <a:bodyPr wrap="square">
-            <a:spAutoFit/>
-          </a:bodyPr>
-          <a:lstStyle/>
-          <a:p>
-            <a:pPr algn="ctr"/>
-            <a:r>
-              <a:rPr sz="2000" b="0" i="1">
-                <a:solidFill>
-                  <a:srgbClr val="8C8C8C"/>
-                </a:solidFill>
-                <a:latin typeface="Arial"/>
-              </a:rPr>
-              <a:t/>
             </a:r>
           </a:p>
         </p:txBody>
@@ -5443,23 +4813,23 @@
         </p:nvSpPr>
         <p:spPr>
           <a:xfrm>
-            <a:off x="594360" y="1837944"/>
-            <a:ext cx="11002975" cy="685800"/>
-          </a:xfrm>
-          <a:prstGeom prst="rect">
-            <a:avLst/>
-          </a:prstGeom>
-          <a:noFill/>
-        </p:spPr>
-        <p:txBody>
-          <a:bodyPr wrap="square">
-            <a:spAutoFit/>
-          </a:bodyPr>
-          <a:lstStyle/>
-          <a:p>
-            <a:pPr algn="ctr"/>
-            <a:r>
-              <a:rPr sz="4400" b="1" i="0">
+            <a:off x="640080" y="1650492"/>
+            <a:ext cx="10911535" cy="731520"/>
+          </a:xfrm>
+          <a:prstGeom prst="rect">
+            <a:avLst/>
+          </a:prstGeom>
+          <a:noFill/>
+        </p:spPr>
+        <p:txBody>
+          <a:bodyPr wrap="square">
+            <a:spAutoFit/>
+          </a:bodyPr>
+          <a:lstStyle/>
+          <a:p>
+            <a:pPr algn="ctr"/>
+            <a:r>
+              <a:rPr sz="4800" b="1" i="0">
                 <a:solidFill>
                   <a:srgbClr val="FFFFFF"/>
                 </a:solidFill>
@@ -5478,8 +4848,8 @@
         </p:nvSpPr>
         <p:spPr>
           <a:xfrm>
-            <a:off x="594360" y="2560320"/>
-            <a:ext cx="11002975" cy="384048"/>
+            <a:off x="640080" y="2418588"/>
+            <a:ext cx="10911535" cy="365760"/>
           </a:xfrm>
           <a:prstGeom prst="rect">
             <a:avLst/>
@@ -5496,7 +4866,7 @@
             <a:r>
               <a:rPr sz="2400" b="0" i="1">
                 <a:solidFill>
-                  <a:srgbClr val="B4B4B4"/>
+                  <a:srgbClr val="AAAAAA"/>
                 </a:solidFill>
                 <a:latin typeface="Arial"/>
               </a:rPr>
@@ -5513,8 +4883,78 @@
         </p:nvSpPr>
         <p:spPr>
           <a:xfrm>
-            <a:off x="594360" y="2980944"/>
-            <a:ext cx="11002975" cy="347472"/>
+            <a:off x="640080" y="2985516"/>
+            <a:ext cx="10911535" cy="731520"/>
+          </a:xfrm>
+          <a:prstGeom prst="rect">
+            <a:avLst/>
+          </a:prstGeom>
+          <a:noFill/>
+        </p:spPr>
+        <p:txBody>
+          <a:bodyPr wrap="square">
+            <a:spAutoFit/>
+          </a:bodyPr>
+          <a:lstStyle/>
+          <a:p>
+            <a:pPr algn="ctr"/>
+            <a:r>
+              <a:rPr sz="4800" b="1" i="0">
+                <a:solidFill>
+                  <a:srgbClr val="FFFFFF"/>
+                </a:solidFill>
+                <a:latin typeface="Arial"/>
+              </a:rPr>
+              <a:t>王座を捨てられ      世の光へと</a:t>
+            </a:r>
+          </a:p>
+        </p:txBody>
+      </p:sp>
+      <p:sp>
+        <p:nvSpPr>
+          <p:cNvPr id="5" name="TextBox 4"/>
+          <p:cNvSpPr txBox="1"/>
+          <p:nvPr/>
+        </p:nvSpPr>
+        <p:spPr>
+          <a:xfrm>
+            <a:off x="640080" y="3753612"/>
+            <a:ext cx="10911535" cy="365760"/>
+          </a:xfrm>
+          <a:prstGeom prst="rect">
+            <a:avLst/>
+          </a:prstGeom>
+          <a:noFill/>
+        </p:spPr>
+        <p:txBody>
+          <a:bodyPr wrap="square">
+            <a:spAutoFit/>
+          </a:bodyPr>
+          <a:lstStyle/>
+          <a:p>
+            <a:pPr algn="ctr"/>
+            <a:r>
+              <a:rPr sz="2400" b="0" i="1">
+                <a:solidFill>
+                  <a:srgbClr val="AAAAAA"/>
+                </a:solidFill>
+                <a:latin typeface="Arial"/>
+              </a:rPr>
+              <a:t>ouzawosuterare yonohikariheto</a:t>
+            </a:r>
+          </a:p>
+        </p:txBody>
+      </p:sp>
+      <p:sp>
+        <p:nvSpPr>
+          <p:cNvPr id="6" name="TextBox 5"/>
+          <p:cNvSpPr txBox="1"/>
+          <p:nvPr/>
+        </p:nvSpPr>
+        <p:spPr>
+          <a:xfrm>
+            <a:off x="640080" y="4530852"/>
+            <a:ext cx="10911535" cy="310896"/>
           </a:xfrm>
           <a:prstGeom prst="rect">
             <a:avLst/>
@@ -5531,7 +4971,7 @@
             <a:r>
               <a:rPr sz="2000" b="0" i="1">
                 <a:solidFill>
-                  <a:srgbClr val="8C8C8C"/>
+                  <a:srgbClr val="828282"/>
                 </a:solidFill>
                 <a:latin typeface="Arial"/>
               </a:rPr>
@@ -5542,84 +4982,14 @@
       </p:sp>
       <p:sp>
         <p:nvSpPr>
-          <p:cNvPr id="5" name="TextBox 4"/>
-          <p:cNvSpPr txBox="1"/>
-          <p:nvPr/>
-        </p:nvSpPr>
-        <p:spPr>
-          <a:xfrm>
-            <a:off x="594360" y="3529584"/>
-            <a:ext cx="11002975" cy="685800"/>
-          </a:xfrm>
-          <a:prstGeom prst="rect">
-            <a:avLst/>
-          </a:prstGeom>
-          <a:noFill/>
-        </p:spPr>
-        <p:txBody>
-          <a:bodyPr wrap="square">
-            <a:spAutoFit/>
-          </a:bodyPr>
-          <a:lstStyle/>
-          <a:p>
-            <a:pPr algn="ctr"/>
-            <a:r>
-              <a:rPr sz="4400" b="1" i="0">
-                <a:solidFill>
-                  <a:srgbClr val="FFFFFF"/>
-                </a:solidFill>
-                <a:latin typeface="Arial"/>
-              </a:rPr>
-              <a:t>王座を捨てられ      世の光へと</a:t>
-            </a:r>
-          </a:p>
-        </p:txBody>
-      </p:sp>
-      <p:sp>
-        <p:nvSpPr>
-          <p:cNvPr id="6" name="TextBox 5"/>
-          <p:cNvSpPr txBox="1"/>
-          <p:nvPr/>
-        </p:nvSpPr>
-        <p:spPr>
-          <a:xfrm>
-            <a:off x="594360" y="4251960"/>
-            <a:ext cx="11002975" cy="384048"/>
-          </a:xfrm>
-          <a:prstGeom prst="rect">
-            <a:avLst/>
-          </a:prstGeom>
-          <a:noFill/>
-        </p:spPr>
-        <p:txBody>
-          <a:bodyPr wrap="square">
-            <a:spAutoFit/>
-          </a:bodyPr>
-          <a:lstStyle/>
-          <a:p>
-            <a:pPr algn="ctr"/>
-            <a:r>
-              <a:rPr sz="2400" b="0" i="1">
-                <a:solidFill>
-                  <a:srgbClr val="B4B4B4"/>
-                </a:solidFill>
-                <a:latin typeface="Arial"/>
-              </a:rPr>
-              <a:t>ouzawosuterare yonohikariheto</a:t>
-            </a:r>
-          </a:p>
-        </p:txBody>
-      </p:sp>
-      <p:sp>
-        <p:nvSpPr>
           <p:cNvPr id="7" name="TextBox 6"/>
           <p:cNvSpPr txBox="1"/>
           <p:nvPr/>
         </p:nvSpPr>
         <p:spPr>
           <a:xfrm>
-            <a:off x="594360" y="4672584"/>
-            <a:ext cx="11002975" cy="347472"/>
+            <a:off x="640080" y="4896612"/>
+            <a:ext cx="10911535" cy="310896"/>
           </a:xfrm>
           <a:prstGeom prst="rect">
             <a:avLst/>
@@ -5636,7 +5006,7 @@
             <a:r>
               <a:rPr sz="2000" b="0" i="1">
                 <a:solidFill>
-                  <a:srgbClr val="8C8C8C"/>
+                  <a:srgbClr val="828282"/>
                 </a:solidFill>
                 <a:latin typeface="Arial"/>
               </a:rPr>
@@ -5679,23 +5049,23 @@
         </p:nvSpPr>
         <p:spPr>
           <a:xfrm>
-            <a:off x="594360" y="1837944"/>
-            <a:ext cx="11002975" cy="685800"/>
-          </a:xfrm>
-          <a:prstGeom prst="rect">
-            <a:avLst/>
-          </a:prstGeom>
-          <a:noFill/>
-        </p:spPr>
-        <p:txBody>
-          <a:bodyPr wrap="square">
-            <a:spAutoFit/>
-          </a:bodyPr>
-          <a:lstStyle/>
-          <a:p>
-            <a:pPr algn="ctr"/>
-            <a:r>
-              <a:rPr sz="4400" b="1" i="0">
+            <a:off x="640080" y="1650492"/>
+            <a:ext cx="10911535" cy="731520"/>
+          </a:xfrm>
+          <a:prstGeom prst="rect">
+            <a:avLst/>
+          </a:prstGeom>
+          <a:noFill/>
+        </p:spPr>
+        <p:txBody>
+          <a:bodyPr wrap="square">
+            <a:spAutoFit/>
+          </a:bodyPr>
+          <a:lstStyle/>
+          <a:p>
+            <a:pPr algn="ctr"/>
+            <a:r>
+              <a:rPr sz="4800" b="1" i="0">
                 <a:solidFill>
                   <a:srgbClr val="FFFFFF"/>
                 </a:solidFill>
@@ -5714,8 +5084,8 @@
         </p:nvSpPr>
         <p:spPr>
           <a:xfrm>
-            <a:off x="594360" y="2560320"/>
-            <a:ext cx="11002975" cy="384048"/>
+            <a:off x="640080" y="2418588"/>
+            <a:ext cx="10911535" cy="365760"/>
           </a:xfrm>
           <a:prstGeom prst="rect">
             <a:avLst/>
@@ -5732,7 +5102,7 @@
             <a:r>
               <a:rPr sz="2400" b="0" i="1">
                 <a:solidFill>
-                  <a:srgbClr val="B4B4B4"/>
+                  <a:srgbClr val="AAAAAA"/>
                 </a:solidFill>
                 <a:latin typeface="Arial"/>
               </a:rPr>
@@ -5749,29 +5119,29 @@
         </p:nvSpPr>
         <p:spPr>
           <a:xfrm>
-            <a:off x="594360" y="2980944"/>
-            <a:ext cx="11002975" cy="347472"/>
-          </a:xfrm>
-          <a:prstGeom prst="rect">
-            <a:avLst/>
-          </a:prstGeom>
-          <a:noFill/>
-        </p:spPr>
-        <p:txBody>
-          <a:bodyPr wrap="square">
-            <a:spAutoFit/>
-          </a:bodyPr>
-          <a:lstStyle/>
-          <a:p>
-            <a:pPr algn="ctr"/>
-            <a:r>
-              <a:rPr sz="2000" b="0" i="1">
-                <a:solidFill>
-                  <a:srgbClr val="8C8C8C"/>
-                </a:solidFill>
-                <a:latin typeface="Arial"/>
-              </a:rPr>
-              <a:t/>
+            <a:off x="640080" y="2985516"/>
+            <a:ext cx="10911535" cy="731520"/>
+          </a:xfrm>
+          <a:prstGeom prst="rect">
+            <a:avLst/>
+          </a:prstGeom>
+          <a:noFill/>
+        </p:spPr>
+        <p:txBody>
+          <a:bodyPr wrap="square">
+            <a:spAutoFit/>
+          </a:bodyPr>
+          <a:lstStyle/>
+          <a:p>
+            <a:pPr algn="ctr"/>
+            <a:r>
+              <a:rPr sz="4800" b="1" i="0">
+                <a:solidFill>
+                  <a:srgbClr val="FFFFFF"/>
+                </a:solidFill>
+                <a:latin typeface="Arial"/>
+              </a:rPr>
+              <a:t>キリストの愛     いのち与えた</a:t>
             </a:r>
           </a:p>
         </p:txBody>
@@ -5784,43 +5154,8 @@
         </p:nvSpPr>
         <p:spPr>
           <a:xfrm>
-            <a:off x="594360" y="3529584"/>
-            <a:ext cx="11002975" cy="685800"/>
-          </a:xfrm>
-          <a:prstGeom prst="rect">
-            <a:avLst/>
-          </a:prstGeom>
-          <a:noFill/>
-        </p:spPr>
-        <p:txBody>
-          <a:bodyPr wrap="square">
-            <a:spAutoFit/>
-          </a:bodyPr>
-          <a:lstStyle/>
-          <a:p>
-            <a:pPr algn="ctr"/>
-            <a:r>
-              <a:rPr sz="4400" b="1" i="0">
-                <a:solidFill>
-                  <a:srgbClr val="FFFFFF"/>
-                </a:solidFill>
-                <a:latin typeface="Arial"/>
-              </a:rPr>
-              <a:t>キリストの愛     いのち与えた</a:t>
-            </a:r>
-          </a:p>
-        </p:txBody>
-      </p:sp>
-      <p:sp>
-        <p:nvSpPr>
-          <p:cNvPr id="6" name="TextBox 5"/>
-          <p:cNvSpPr txBox="1"/>
-          <p:nvPr/>
-        </p:nvSpPr>
-        <p:spPr>
-          <a:xfrm>
-            <a:off x="594360" y="4251960"/>
-            <a:ext cx="11002975" cy="384048"/>
+            <a:off x="640080" y="3753612"/>
+            <a:ext cx="10911535" cy="365760"/>
           </a:xfrm>
           <a:prstGeom prst="rect">
             <a:avLst/>
@@ -5837,46 +5172,11 @@
             <a:r>
               <a:rPr sz="2400" b="0" i="1">
                 <a:solidFill>
-                  <a:srgbClr val="B4B4B4"/>
+                  <a:srgbClr val="AAAAAA"/>
                 </a:solidFill>
                 <a:latin typeface="Arial"/>
               </a:rPr>
               <a:t>kirisuto no ai inochi ataeta</a:t>
-            </a:r>
-          </a:p>
-        </p:txBody>
-      </p:sp>
-      <p:sp>
-        <p:nvSpPr>
-          <p:cNvPr id="7" name="TextBox 6"/>
-          <p:cNvSpPr txBox="1"/>
-          <p:nvPr/>
-        </p:nvSpPr>
-        <p:spPr>
-          <a:xfrm>
-            <a:off x="594360" y="4672584"/>
-            <a:ext cx="11002975" cy="347472"/>
-          </a:xfrm>
-          <a:prstGeom prst="rect">
-            <a:avLst/>
-          </a:prstGeom>
-          <a:noFill/>
-        </p:spPr>
-        <p:txBody>
-          <a:bodyPr wrap="square">
-            <a:spAutoFit/>
-          </a:bodyPr>
-          <a:lstStyle/>
-          <a:p>
-            <a:pPr algn="ctr"/>
-            <a:r>
-              <a:rPr sz="2000" b="0" i="1">
-                <a:solidFill>
-                  <a:srgbClr val="8C8C8C"/>
-                </a:solidFill>
-                <a:latin typeface="Arial"/>
-              </a:rPr>
-              <a:t/>
             </a:r>
           </a:p>
         </p:txBody>
@@ -5915,23 +5215,23 @@
         </p:nvSpPr>
         <p:spPr>
           <a:xfrm>
-            <a:off x="594360" y="1837944"/>
-            <a:ext cx="11002975" cy="685800"/>
-          </a:xfrm>
-          <a:prstGeom prst="rect">
-            <a:avLst/>
-          </a:prstGeom>
-          <a:noFill/>
-        </p:spPr>
-        <p:txBody>
-          <a:bodyPr wrap="square">
-            <a:spAutoFit/>
-          </a:bodyPr>
-          <a:lstStyle/>
-          <a:p>
-            <a:pPr algn="ctr"/>
-            <a:r>
-              <a:rPr sz="4400" b="1" i="0">
+            <a:off x="640080" y="1650492"/>
+            <a:ext cx="10911535" cy="731520"/>
+          </a:xfrm>
+          <a:prstGeom prst="rect">
+            <a:avLst/>
+          </a:prstGeom>
+          <a:noFill/>
+        </p:spPr>
+        <p:txBody>
+          <a:bodyPr wrap="square">
+            <a:spAutoFit/>
+          </a:bodyPr>
+          <a:lstStyle/>
+          <a:p>
+            <a:pPr algn="ctr"/>
+            <a:r>
+              <a:rPr sz="4800" b="1" i="0">
                 <a:solidFill>
                   <a:srgbClr val="FFFFFF"/>
                 </a:solidFill>
@@ -5950,8 +5250,8 @@
         </p:nvSpPr>
         <p:spPr>
           <a:xfrm>
-            <a:off x="594360" y="2560320"/>
-            <a:ext cx="11002975" cy="384048"/>
+            <a:off x="640080" y="2418588"/>
+            <a:ext cx="10911535" cy="365760"/>
           </a:xfrm>
           <a:prstGeom prst="rect">
             <a:avLst/>
@@ -5968,7 +5268,7 @@
             <a:r>
               <a:rPr sz="2400" b="0" i="1">
                 <a:solidFill>
-                  <a:srgbClr val="B4B4B4"/>
+                  <a:srgbClr val="AAAAAA"/>
                 </a:solidFill>
                 <a:latin typeface="Arial"/>
               </a:rPr>
@@ -5985,8 +5285,78 @@
         </p:nvSpPr>
         <p:spPr>
           <a:xfrm>
-            <a:off x="594360" y="2980944"/>
-            <a:ext cx="11002975" cy="347472"/>
+            <a:off x="640080" y="2985516"/>
+            <a:ext cx="10911535" cy="731520"/>
+          </a:xfrm>
+          <a:prstGeom prst="rect">
+            <a:avLst/>
+          </a:prstGeom>
+          <a:noFill/>
+        </p:spPr>
+        <p:txBody>
+          <a:bodyPr wrap="square">
+            <a:spAutoFit/>
+          </a:bodyPr>
+          <a:lstStyle/>
+          <a:p>
+            <a:pPr algn="ctr"/>
+            <a:r>
+              <a:rPr sz="4800" b="1" i="0">
+                <a:solidFill>
+                  <a:srgbClr val="FFFFFF"/>
+                </a:solidFill>
+                <a:latin typeface="Arial"/>
+              </a:rPr>
+              <a:t>永遠(とわ)に讃える 栄光の王の王</a:t>
+            </a:r>
+          </a:p>
+        </p:txBody>
+      </p:sp>
+      <p:sp>
+        <p:nvSpPr>
+          <p:cNvPr id="5" name="TextBox 4"/>
+          <p:cNvSpPr txBox="1"/>
+          <p:nvPr/>
+        </p:nvSpPr>
+        <p:spPr>
+          <a:xfrm>
+            <a:off x="640080" y="3753612"/>
+            <a:ext cx="10911535" cy="365760"/>
+          </a:xfrm>
+          <a:prstGeom prst="rect">
+            <a:avLst/>
+          </a:prstGeom>
+          <a:noFill/>
+        </p:spPr>
+        <p:txBody>
+          <a:bodyPr wrap="square">
+            <a:spAutoFit/>
+          </a:bodyPr>
+          <a:lstStyle/>
+          <a:p>
+            <a:pPr algn="ctr"/>
+            <a:r>
+              <a:rPr sz="2400" b="0" i="1">
+                <a:solidFill>
+                  <a:srgbClr val="AAAAAA"/>
+                </a:solidFill>
+                <a:latin typeface="Arial"/>
+              </a:rPr>
+              <a:t>towanitataeru   eikou no ou no ou</a:t>
+            </a:r>
+          </a:p>
+        </p:txBody>
+      </p:sp>
+      <p:sp>
+        <p:nvSpPr>
+          <p:cNvPr id="6" name="TextBox 5"/>
+          <p:cNvSpPr txBox="1"/>
+          <p:nvPr/>
+        </p:nvSpPr>
+        <p:spPr>
+          <a:xfrm>
+            <a:off x="640080" y="4530852"/>
+            <a:ext cx="10911535" cy="310896"/>
           </a:xfrm>
           <a:prstGeom prst="rect">
             <a:avLst/>
@@ -6003,7 +5373,7 @@
             <a:r>
               <a:rPr sz="2000" b="0" i="1">
                 <a:solidFill>
-                  <a:srgbClr val="8C8C8C"/>
+                  <a:srgbClr val="828282"/>
                 </a:solidFill>
                 <a:latin typeface="Arial"/>
               </a:rPr>
@@ -6014,84 +5384,14 @@
       </p:sp>
       <p:sp>
         <p:nvSpPr>
-          <p:cNvPr id="5" name="TextBox 4"/>
-          <p:cNvSpPr txBox="1"/>
-          <p:nvPr/>
-        </p:nvSpPr>
-        <p:spPr>
-          <a:xfrm>
-            <a:off x="594360" y="3529584"/>
-            <a:ext cx="11002975" cy="685800"/>
-          </a:xfrm>
-          <a:prstGeom prst="rect">
-            <a:avLst/>
-          </a:prstGeom>
-          <a:noFill/>
-        </p:spPr>
-        <p:txBody>
-          <a:bodyPr wrap="square">
-            <a:spAutoFit/>
-          </a:bodyPr>
-          <a:lstStyle/>
-          <a:p>
-            <a:pPr algn="ctr"/>
-            <a:r>
-              <a:rPr sz="4400" b="1" i="0">
-                <a:solidFill>
-                  <a:srgbClr val="FFFFFF"/>
-                </a:solidFill>
-                <a:latin typeface="Arial"/>
-              </a:rPr>
-              <a:t>永遠(とわ)に讃える 栄光の王の王</a:t>
-            </a:r>
-          </a:p>
-        </p:txBody>
-      </p:sp>
-      <p:sp>
-        <p:nvSpPr>
-          <p:cNvPr id="6" name="TextBox 5"/>
-          <p:cNvSpPr txBox="1"/>
-          <p:nvPr/>
-        </p:nvSpPr>
-        <p:spPr>
-          <a:xfrm>
-            <a:off x="594360" y="4251960"/>
-            <a:ext cx="11002975" cy="384048"/>
-          </a:xfrm>
-          <a:prstGeom prst="rect">
-            <a:avLst/>
-          </a:prstGeom>
-          <a:noFill/>
-        </p:spPr>
-        <p:txBody>
-          <a:bodyPr wrap="square">
-            <a:spAutoFit/>
-          </a:bodyPr>
-          <a:lstStyle/>
-          <a:p>
-            <a:pPr algn="ctr"/>
-            <a:r>
-              <a:rPr sz="2400" b="0" i="1">
-                <a:solidFill>
-                  <a:srgbClr val="B4B4B4"/>
-                </a:solidFill>
-                <a:latin typeface="Arial"/>
-              </a:rPr>
-              <a:t>towanitataeru   eikou no ou no ou</a:t>
-            </a:r>
-          </a:p>
-        </p:txBody>
-      </p:sp>
-      <p:sp>
-        <p:nvSpPr>
           <p:cNvPr id="7" name="TextBox 6"/>
           <p:cNvSpPr txBox="1"/>
           <p:nvPr/>
         </p:nvSpPr>
         <p:spPr>
           <a:xfrm>
-            <a:off x="594360" y="4672584"/>
-            <a:ext cx="11002975" cy="347472"/>
+            <a:off x="640080" y="4896612"/>
+            <a:ext cx="10911535" cy="310896"/>
           </a:xfrm>
           <a:prstGeom prst="rect">
             <a:avLst/>
@@ -6108,7 +5408,7 @@
             <a:r>
               <a:rPr sz="2000" b="0" i="1">
                 <a:solidFill>
-                  <a:srgbClr val="8C8C8C"/>
+                  <a:srgbClr val="828282"/>
                 </a:solidFill>
                 <a:latin typeface="Arial"/>
               </a:rPr>
@@ -6151,23 +5451,23 @@
         </p:nvSpPr>
         <p:spPr>
           <a:xfrm>
-            <a:off x="594360" y="2258568"/>
-            <a:ext cx="11002975" cy="685800"/>
-          </a:xfrm>
-          <a:prstGeom prst="rect">
-            <a:avLst/>
-          </a:prstGeom>
-          <a:noFill/>
-        </p:spPr>
-        <p:txBody>
-          <a:bodyPr wrap="square">
-            <a:spAutoFit/>
-          </a:bodyPr>
-          <a:lstStyle/>
-          <a:p>
-            <a:pPr algn="ctr"/>
-            <a:r>
-              <a:rPr sz="4400" b="1" i="0">
+            <a:off x="640080" y="2052828"/>
+            <a:ext cx="10911535" cy="731520"/>
+          </a:xfrm>
+          <a:prstGeom prst="rect">
+            <a:avLst/>
+          </a:prstGeom>
+          <a:noFill/>
+        </p:spPr>
+        <p:txBody>
+          <a:bodyPr wrap="square">
+            <a:spAutoFit/>
+          </a:bodyPr>
+          <a:lstStyle/>
+          <a:p>
+            <a:pPr algn="ctr"/>
+            <a:r>
+              <a:rPr sz="4800" b="1" i="0">
                 <a:solidFill>
                   <a:srgbClr val="FFFFFF"/>
                 </a:solidFill>
@@ -6186,25 +5486,60 @@
         </p:nvSpPr>
         <p:spPr>
           <a:xfrm>
-            <a:off x="594360" y="2980944"/>
-            <a:ext cx="11002975" cy="347472"/>
-          </a:xfrm>
-          <a:prstGeom prst="rect">
-            <a:avLst/>
-          </a:prstGeom>
-          <a:noFill/>
-        </p:spPr>
-        <p:txBody>
-          <a:bodyPr wrap="square">
-            <a:spAutoFit/>
-          </a:bodyPr>
-          <a:lstStyle/>
-          <a:p>
-            <a:pPr algn="ctr"/>
-            <a:r>
-              <a:rPr sz="2200" b="0" i="1">
-                <a:solidFill>
-                  <a:srgbClr val="8C8C8C"/>
+            <a:off x="640080" y="2985516"/>
+            <a:ext cx="10911535" cy="731520"/>
+          </a:xfrm>
+          <a:prstGeom prst="rect">
+            <a:avLst/>
+          </a:prstGeom>
+          <a:noFill/>
+        </p:spPr>
+        <p:txBody>
+          <a:bodyPr wrap="square">
+            <a:spAutoFit/>
+          </a:bodyPr>
+          <a:lstStyle/>
+          <a:p>
+            <a:pPr algn="ctr"/>
+            <a:r>
+              <a:rPr sz="4800" b="1" i="0">
+                <a:solidFill>
+                  <a:srgbClr val="FFFFFF"/>
+                </a:solidFill>
+                <a:latin typeface="Arial"/>
+              </a:rPr>
+              <a:t>Aleluia</a:t>
+            </a:r>
+          </a:p>
+        </p:txBody>
+      </p:sp>
+      <p:sp>
+        <p:nvSpPr>
+          <p:cNvPr id="4" name="TextBox 3"/>
+          <p:cNvSpPr txBox="1"/>
+          <p:nvPr/>
+        </p:nvSpPr>
+        <p:spPr>
+          <a:xfrm>
+            <a:off x="640080" y="4128516"/>
+            <a:ext cx="10911535" cy="310896"/>
+          </a:xfrm>
+          <a:prstGeom prst="rect">
+            <a:avLst/>
+          </a:prstGeom>
+          <a:noFill/>
+        </p:spPr>
+        <p:txBody>
+          <a:bodyPr wrap="square">
+            <a:spAutoFit/>
+          </a:bodyPr>
+          <a:lstStyle/>
+          <a:p>
+            <a:pPr algn="ctr"/>
+            <a:r>
+              <a:rPr sz="2000" b="0" i="0">
+                <a:solidFill>
+                  <a:srgbClr val="828282"/>
                 </a:solidFill>
                 <a:latin typeface="Arial"/>
               </a:rPr>
@@ -6215,66 +5550,31 @@
       </p:sp>
       <p:sp>
         <p:nvSpPr>
-          <p:cNvPr id="4" name="TextBox 3"/>
-          <p:cNvSpPr txBox="1"/>
-          <p:nvPr/>
-        </p:nvSpPr>
-        <p:spPr>
-          <a:xfrm>
-            <a:off x="594360" y="3529584"/>
-            <a:ext cx="11002975" cy="685800"/>
-          </a:xfrm>
-          <a:prstGeom prst="rect">
-            <a:avLst/>
-          </a:prstGeom>
-          <a:noFill/>
-        </p:spPr>
-        <p:txBody>
-          <a:bodyPr wrap="square">
-            <a:spAutoFit/>
-          </a:bodyPr>
-          <a:lstStyle/>
-          <a:p>
-            <a:pPr algn="ctr"/>
-            <a:r>
-              <a:rPr sz="4400" b="1" i="0">
-                <a:solidFill>
-                  <a:srgbClr val="FFFFFF"/>
-                </a:solidFill>
-                <a:latin typeface="Arial"/>
-              </a:rPr>
-              <a:t>Aleluia</a:t>
-            </a:r>
-          </a:p>
-        </p:txBody>
-      </p:sp>
-      <p:sp>
-        <p:nvSpPr>
           <p:cNvPr id="5" name="TextBox 4"/>
           <p:cNvSpPr txBox="1"/>
           <p:nvPr/>
         </p:nvSpPr>
         <p:spPr>
           <a:xfrm>
-            <a:off x="594360" y="4251960"/>
-            <a:ext cx="11002975" cy="347472"/>
-          </a:xfrm>
-          <a:prstGeom prst="rect">
-            <a:avLst/>
-          </a:prstGeom>
-          <a:noFill/>
-        </p:spPr>
-        <p:txBody>
-          <a:bodyPr wrap="square">
-            <a:spAutoFit/>
-          </a:bodyPr>
-          <a:lstStyle/>
-          <a:p>
-            <a:pPr algn="ctr"/>
-            <a:r>
-              <a:rPr sz="2200" b="0" i="1">
-                <a:solidFill>
-                  <a:srgbClr val="8C8C8C"/>
+            <a:off x="640080" y="4494276"/>
+            <a:ext cx="10911535" cy="310896"/>
+          </a:xfrm>
+          <a:prstGeom prst="rect">
+            <a:avLst/>
+          </a:prstGeom>
+          <a:noFill/>
+        </p:spPr>
+        <p:txBody>
+          <a:bodyPr wrap="square">
+            <a:spAutoFit/>
+          </a:bodyPr>
+          <a:lstStyle/>
+          <a:p>
+            <a:pPr algn="ctr"/>
+            <a:r>
+              <a:rPr sz="2000" b="0" i="0">
+                <a:solidFill>
+                  <a:srgbClr val="828282"/>
                 </a:solidFill>
                 <a:latin typeface="Arial"/>
               </a:rPr>
@@ -6317,23 +5617,23 @@
         </p:nvSpPr>
         <p:spPr>
           <a:xfrm>
-            <a:off x="594360" y="2258568"/>
-            <a:ext cx="11002975" cy="685800"/>
-          </a:xfrm>
-          <a:prstGeom prst="rect">
-            <a:avLst/>
-          </a:prstGeom>
-          <a:noFill/>
-        </p:spPr>
-        <p:txBody>
-          <a:bodyPr wrap="square">
-            <a:spAutoFit/>
-          </a:bodyPr>
-          <a:lstStyle/>
-          <a:p>
-            <a:pPr algn="ctr"/>
-            <a:r>
-              <a:rPr sz="4400" b="1" i="0">
+            <a:off x="640080" y="2052828"/>
+            <a:ext cx="10911535" cy="731520"/>
+          </a:xfrm>
+          <a:prstGeom prst="rect">
+            <a:avLst/>
+          </a:prstGeom>
+          <a:noFill/>
+        </p:spPr>
+        <p:txBody>
+          <a:bodyPr wrap="square">
+            <a:spAutoFit/>
+          </a:bodyPr>
+          <a:lstStyle/>
+          <a:p>
+            <a:pPr algn="ctr"/>
+            <a:r>
+              <a:rPr sz="4800" b="1" i="0">
                 <a:solidFill>
                   <a:srgbClr val="FFFFFF"/>
                 </a:solidFill>
@@ -6352,25 +5652,60 @@
         </p:nvSpPr>
         <p:spPr>
           <a:xfrm>
-            <a:off x="594360" y="2980944"/>
-            <a:ext cx="11002975" cy="347472"/>
-          </a:xfrm>
-          <a:prstGeom prst="rect">
-            <a:avLst/>
-          </a:prstGeom>
-          <a:noFill/>
-        </p:spPr>
-        <p:txBody>
-          <a:bodyPr wrap="square">
-            <a:spAutoFit/>
-          </a:bodyPr>
-          <a:lstStyle/>
-          <a:p>
-            <a:pPr algn="ctr"/>
-            <a:r>
-              <a:rPr sz="2200" b="0" i="1">
-                <a:solidFill>
-                  <a:srgbClr val="8C8C8C"/>
+            <a:off x="640080" y="2985516"/>
+            <a:ext cx="10911535" cy="731520"/>
+          </a:xfrm>
+          <a:prstGeom prst="rect">
+            <a:avLst/>
+          </a:prstGeom>
+          <a:noFill/>
+        </p:spPr>
+        <p:txBody>
+          <a:bodyPr wrap="square">
+            <a:spAutoFit/>
+          </a:bodyPr>
+          <a:lstStyle/>
+          <a:p>
+            <a:pPr algn="ctr"/>
+            <a:r>
+              <a:rPr sz="4800" b="1" i="0">
+                <a:solidFill>
+                  <a:srgbClr val="FFFFFF"/>
+                </a:solidFill>
+                <a:latin typeface="Arial"/>
+              </a:rPr>
+              <a:t>Senhor dos senhores</a:t>
+            </a:r>
+          </a:p>
+        </p:txBody>
+      </p:sp>
+      <p:sp>
+        <p:nvSpPr>
+          <p:cNvPr id="4" name="TextBox 3"/>
+          <p:cNvSpPr txBox="1"/>
+          <p:nvPr/>
+        </p:nvSpPr>
+        <p:spPr>
+          <a:xfrm>
+            <a:off x="640080" y="4128516"/>
+            <a:ext cx="10911535" cy="310896"/>
+          </a:xfrm>
+          <a:prstGeom prst="rect">
+            <a:avLst/>
+          </a:prstGeom>
+          <a:noFill/>
+        </p:spPr>
+        <p:txBody>
+          <a:bodyPr wrap="square">
+            <a:spAutoFit/>
+          </a:bodyPr>
+          <a:lstStyle/>
+          <a:p>
+            <a:pPr algn="ctr"/>
+            <a:r>
+              <a:rPr sz="2000" b="0" i="0">
+                <a:solidFill>
+                  <a:srgbClr val="828282"/>
                 </a:solidFill>
                 <a:latin typeface="Arial"/>
               </a:rPr>
@@ -6381,66 +5716,31 @@
       </p:sp>
       <p:sp>
         <p:nvSpPr>
-          <p:cNvPr id="4" name="TextBox 3"/>
-          <p:cNvSpPr txBox="1"/>
-          <p:nvPr/>
-        </p:nvSpPr>
-        <p:spPr>
-          <a:xfrm>
-            <a:off x="594360" y="3529584"/>
-            <a:ext cx="11002975" cy="685800"/>
-          </a:xfrm>
-          <a:prstGeom prst="rect">
-            <a:avLst/>
-          </a:prstGeom>
-          <a:noFill/>
-        </p:spPr>
-        <p:txBody>
-          <a:bodyPr wrap="square">
-            <a:spAutoFit/>
-          </a:bodyPr>
-          <a:lstStyle/>
-          <a:p>
-            <a:pPr algn="ctr"/>
-            <a:r>
-              <a:rPr sz="4400" b="1" i="0">
-                <a:solidFill>
-                  <a:srgbClr val="FFFFFF"/>
-                </a:solidFill>
-                <a:latin typeface="Arial"/>
-              </a:rPr>
-              <a:t>Senhor dos senhores</a:t>
-            </a:r>
-          </a:p>
-        </p:txBody>
-      </p:sp>
-      <p:sp>
-        <p:nvSpPr>
           <p:cNvPr id="5" name="TextBox 4"/>
           <p:cNvSpPr txBox="1"/>
           <p:nvPr/>
         </p:nvSpPr>
         <p:spPr>
           <a:xfrm>
-            <a:off x="594360" y="4251960"/>
-            <a:ext cx="11002975" cy="347472"/>
-          </a:xfrm>
-          <a:prstGeom prst="rect">
-            <a:avLst/>
-          </a:prstGeom>
-          <a:noFill/>
-        </p:spPr>
-        <p:txBody>
-          <a:bodyPr wrap="square">
-            <a:spAutoFit/>
-          </a:bodyPr>
-          <a:lstStyle/>
-          <a:p>
-            <a:pPr algn="ctr"/>
-            <a:r>
-              <a:rPr sz="2200" b="0" i="1">
-                <a:solidFill>
-                  <a:srgbClr val="8C8C8C"/>
+            <a:off x="640080" y="4494276"/>
+            <a:ext cx="10911535" cy="310896"/>
+          </a:xfrm>
+          <a:prstGeom prst="rect">
+            <a:avLst/>
+          </a:prstGeom>
+          <a:noFill/>
+        </p:spPr>
+        <p:txBody>
+          <a:bodyPr wrap="square">
+            <a:spAutoFit/>
+          </a:bodyPr>
+          <a:lstStyle/>
+          <a:p>
+            <a:pPr algn="ctr"/>
+            <a:r>
+              <a:rPr sz="2000" b="0" i="0">
+                <a:solidFill>
+                  <a:srgbClr val="828282"/>
                 </a:solidFill>
                 <a:latin typeface="Arial"/>
               </a:rPr>
@@ -6483,64 +5783,29 @@
         </p:nvSpPr>
         <p:spPr>
           <a:xfrm>
-            <a:off x="594360" y="2894076"/>
-            <a:ext cx="11002975" cy="685800"/>
-          </a:xfrm>
-          <a:prstGeom prst="rect">
-            <a:avLst/>
-          </a:prstGeom>
-          <a:noFill/>
-        </p:spPr>
-        <p:txBody>
-          <a:bodyPr wrap="square">
-            <a:spAutoFit/>
-          </a:bodyPr>
-          <a:lstStyle/>
-          <a:p>
-            <a:pPr algn="ctr"/>
-            <a:r>
-              <a:rPr sz="4400" b="1" i="0">
+            <a:off x="640080" y="2702052"/>
+            <a:ext cx="10911535" cy="731520"/>
+          </a:xfrm>
+          <a:prstGeom prst="rect">
+            <a:avLst/>
+          </a:prstGeom>
+          <a:noFill/>
+        </p:spPr>
+        <p:txBody>
+          <a:bodyPr wrap="square">
+            <a:spAutoFit/>
+          </a:bodyPr>
+          <a:lstStyle/>
+          <a:p>
+            <a:pPr algn="ctr"/>
+            <a:r>
+              <a:rPr sz="4800" b="1" i="0">
                 <a:solidFill>
                   <a:srgbClr val="FFFFFF"/>
                 </a:solidFill>
                 <a:latin typeface="Arial"/>
               </a:rPr>
               <a:t>Aleluia</a:t>
-            </a:r>
-          </a:p>
-        </p:txBody>
-      </p:sp>
-      <p:sp>
-        <p:nvSpPr>
-          <p:cNvPr id="3" name="TextBox 2"/>
-          <p:cNvSpPr txBox="1"/>
-          <p:nvPr/>
-        </p:nvSpPr>
-        <p:spPr>
-          <a:xfrm>
-            <a:off x="594360" y="3616452"/>
-            <a:ext cx="11002975" cy="347472"/>
-          </a:xfrm>
-          <a:prstGeom prst="rect">
-            <a:avLst/>
-          </a:prstGeom>
-          <a:noFill/>
-        </p:spPr>
-        <p:txBody>
-          <a:bodyPr wrap="square">
-            <a:spAutoFit/>
-          </a:bodyPr>
-          <a:lstStyle/>
-          <a:p>
-            <a:pPr algn="ctr"/>
-            <a:r>
-              <a:rPr sz="2200" b="0" i="1">
-                <a:solidFill>
-                  <a:srgbClr val="8C8C8C"/>
-                </a:solidFill>
-                <a:latin typeface="Arial"/>
-              </a:rPr>
-              <a:t/>
             </a:r>
           </a:p>
         </p:txBody>
@@ -6579,23 +5844,23 @@
         </p:nvSpPr>
         <p:spPr>
           <a:xfrm>
-            <a:off x="594360" y="2258568"/>
-            <a:ext cx="11002975" cy="685800"/>
-          </a:xfrm>
-          <a:prstGeom prst="rect">
-            <a:avLst/>
-          </a:prstGeom>
-          <a:noFill/>
-        </p:spPr>
-        <p:txBody>
-          <a:bodyPr wrap="square">
-            <a:spAutoFit/>
-          </a:bodyPr>
-          <a:lstStyle/>
-          <a:p>
-            <a:pPr algn="ctr"/>
-            <a:r>
-              <a:rPr sz="4400" b="1" i="0">
+            <a:off x="640080" y="2052828"/>
+            <a:ext cx="10911535" cy="731520"/>
+          </a:xfrm>
+          <a:prstGeom prst="rect">
+            <a:avLst/>
+          </a:prstGeom>
+          <a:noFill/>
+        </p:spPr>
+        <p:txBody>
+          <a:bodyPr wrap="square">
+            <a:spAutoFit/>
+          </a:bodyPr>
+          <a:lstStyle/>
+          <a:p>
+            <a:pPr algn="ctr"/>
+            <a:r>
+              <a:rPr sz="4800" b="1" i="0">
                 <a:solidFill>
                   <a:srgbClr val="FFFFFF"/>
                 </a:solidFill>
@@ -6614,25 +5879,60 @@
         </p:nvSpPr>
         <p:spPr>
           <a:xfrm>
-            <a:off x="594360" y="2980944"/>
-            <a:ext cx="11002975" cy="347472"/>
-          </a:xfrm>
-          <a:prstGeom prst="rect">
-            <a:avLst/>
-          </a:prstGeom>
-          <a:noFill/>
-        </p:spPr>
-        <p:txBody>
-          <a:bodyPr wrap="square">
-            <a:spAutoFit/>
-          </a:bodyPr>
-          <a:lstStyle/>
-          <a:p>
-            <a:pPr algn="ctr"/>
-            <a:r>
-              <a:rPr sz="2200" b="0" i="1">
-                <a:solidFill>
-                  <a:srgbClr val="8C8C8C"/>
+            <a:off x="640080" y="2985516"/>
+            <a:ext cx="10911535" cy="731520"/>
+          </a:xfrm>
+          <a:prstGeom prst="rect">
+            <a:avLst/>
+          </a:prstGeom>
+          <a:noFill/>
+        </p:spPr>
+        <p:txBody>
+          <a:bodyPr wrap="square">
+            <a:spAutoFit/>
+          </a:bodyPr>
+          <a:lstStyle/>
+          <a:p>
+            <a:pPr algn="ctr"/>
+            <a:r>
+              <a:rPr sz="4800" b="1" i="0">
+                <a:solidFill>
+                  <a:srgbClr val="FFFFFF"/>
+                </a:solidFill>
+                <a:latin typeface="Arial"/>
+              </a:rPr>
+              <a:t>Até que dos céus vieste</a:t>
+            </a:r>
+          </a:p>
+        </p:txBody>
+      </p:sp>
+      <p:sp>
+        <p:nvSpPr>
+          <p:cNvPr id="4" name="TextBox 3"/>
+          <p:cNvSpPr txBox="1"/>
+          <p:nvPr/>
+        </p:nvSpPr>
+        <p:spPr>
+          <a:xfrm>
+            <a:off x="640080" y="4128516"/>
+            <a:ext cx="10911535" cy="310896"/>
+          </a:xfrm>
+          <a:prstGeom prst="rect">
+            <a:avLst/>
+          </a:prstGeom>
+          <a:noFill/>
+        </p:spPr>
+        <p:txBody>
+          <a:bodyPr wrap="square">
+            <a:spAutoFit/>
+          </a:bodyPr>
+          <a:lstStyle/>
+          <a:p>
+            <a:pPr algn="ctr"/>
+            <a:r>
+              <a:rPr sz="2000" b="0" i="0">
+                <a:solidFill>
+                  <a:srgbClr val="828282"/>
                 </a:solidFill>
                 <a:latin typeface="Arial"/>
               </a:rPr>
@@ -6643,66 +5943,31 @@
       </p:sp>
       <p:sp>
         <p:nvSpPr>
-          <p:cNvPr id="4" name="TextBox 3"/>
-          <p:cNvSpPr txBox="1"/>
-          <p:nvPr/>
-        </p:nvSpPr>
-        <p:spPr>
-          <a:xfrm>
-            <a:off x="594360" y="3529584"/>
-            <a:ext cx="11002975" cy="685800"/>
-          </a:xfrm>
-          <a:prstGeom prst="rect">
-            <a:avLst/>
-          </a:prstGeom>
-          <a:noFill/>
-        </p:spPr>
-        <p:txBody>
-          <a:bodyPr wrap="square">
-            <a:spAutoFit/>
-          </a:bodyPr>
-          <a:lstStyle/>
-          <a:p>
-            <a:pPr algn="ctr"/>
-            <a:r>
-              <a:rPr sz="4400" b="1" i="0">
-                <a:solidFill>
-                  <a:srgbClr val="FFFFFF"/>
-                </a:solidFill>
-                <a:latin typeface="Arial"/>
-              </a:rPr>
-              <a:t>Até que dos céus vieste</a:t>
-            </a:r>
-          </a:p>
-        </p:txBody>
-      </p:sp>
-      <p:sp>
-        <p:nvSpPr>
           <p:cNvPr id="5" name="TextBox 4"/>
           <p:cNvSpPr txBox="1"/>
           <p:nvPr/>
         </p:nvSpPr>
         <p:spPr>
           <a:xfrm>
-            <a:off x="594360" y="4251960"/>
-            <a:ext cx="11002975" cy="347472"/>
-          </a:xfrm>
-          <a:prstGeom prst="rect">
-            <a:avLst/>
-          </a:prstGeom>
-          <a:noFill/>
-        </p:spPr>
-        <p:txBody>
-          <a:bodyPr wrap="square">
-            <a:spAutoFit/>
-          </a:bodyPr>
-          <a:lstStyle/>
-          <a:p>
-            <a:pPr algn="ctr"/>
-            <a:r>
-              <a:rPr sz="2200" b="0" i="1">
-                <a:solidFill>
-                  <a:srgbClr val="8C8C8C"/>
+            <a:off x="640080" y="4494276"/>
+            <a:ext cx="10911535" cy="310896"/>
+          </a:xfrm>
+          <a:prstGeom prst="rect">
+            <a:avLst/>
+          </a:prstGeom>
+          <a:noFill/>
+        </p:spPr>
+        <p:txBody>
+          <a:bodyPr wrap="square">
+            <a:spAutoFit/>
+          </a:bodyPr>
+          <a:lstStyle/>
+          <a:p>
+            <a:pPr algn="ctr"/>
+            <a:r>
+              <a:rPr sz="2000" b="0" i="0">
+                <a:solidFill>
+                  <a:srgbClr val="828282"/>
                 </a:solidFill>
                 <a:latin typeface="Arial"/>
               </a:rPr>
@@ -6745,23 +6010,23 @@
         </p:nvSpPr>
         <p:spPr>
           <a:xfrm>
-            <a:off x="594360" y="2258568"/>
-            <a:ext cx="11002975" cy="685800"/>
-          </a:xfrm>
-          <a:prstGeom prst="rect">
-            <a:avLst/>
-          </a:prstGeom>
-          <a:noFill/>
-        </p:spPr>
-        <p:txBody>
-          <a:bodyPr wrap="square">
-            <a:spAutoFit/>
-          </a:bodyPr>
-          <a:lstStyle/>
-          <a:p>
-            <a:pPr algn="ctr"/>
-            <a:r>
-              <a:rPr sz="4400" b="1" i="0">
+            <a:off x="640080" y="2052828"/>
+            <a:ext cx="10911535" cy="731520"/>
+          </a:xfrm>
+          <a:prstGeom prst="rect">
+            <a:avLst/>
+          </a:prstGeom>
+          <a:noFill/>
+        </p:spPr>
+        <p:txBody>
+          <a:bodyPr wrap="square">
+            <a:spAutoFit/>
+          </a:bodyPr>
+          <a:lstStyle/>
+          <a:p>
+            <a:pPr algn="ctr"/>
+            <a:r>
+              <a:rPr sz="4800" b="1" i="0">
                 <a:solidFill>
                   <a:srgbClr val="FFFFFF"/>
                 </a:solidFill>
@@ -6780,25 +6045,60 @@
         </p:nvSpPr>
         <p:spPr>
           <a:xfrm>
-            <a:off x="594360" y="2980944"/>
-            <a:ext cx="11002975" cy="347472"/>
-          </a:xfrm>
-          <a:prstGeom prst="rect">
-            <a:avLst/>
-          </a:prstGeom>
-          <a:noFill/>
-        </p:spPr>
-        <p:txBody>
-          <a:bodyPr wrap="square">
-            <a:spAutoFit/>
-          </a:bodyPr>
-          <a:lstStyle/>
-          <a:p>
-            <a:pPr algn="ctr"/>
-            <a:r>
-              <a:rPr sz="2200" b="0" i="1">
-                <a:solidFill>
-                  <a:srgbClr val="8C8C8C"/>
+            <a:off x="640080" y="2985516"/>
+            <a:ext cx="10911535" cy="731520"/>
+          </a:xfrm>
+          <a:prstGeom prst="rect">
+            <a:avLst/>
+          </a:prstGeom>
+          <a:noFill/>
+        </p:spPr>
+        <p:txBody>
+          <a:bodyPr wrap="square">
+            <a:spAutoFit/>
+          </a:bodyPr>
+          <a:lstStyle/>
+          <a:p>
+            <a:pPr algn="ctr"/>
+            <a:r>
+              <a:rPr sz="4800" b="1" i="0">
+                <a:solidFill>
+                  <a:srgbClr val="FFFFFF"/>
+                </a:solidFill>
+                <a:latin typeface="Arial"/>
+              </a:rPr>
+              <a:t>Pra cumprir a profecia</a:t>
+            </a:r>
+          </a:p>
+        </p:txBody>
+      </p:sp>
+      <p:sp>
+        <p:nvSpPr>
+          <p:cNvPr id="4" name="TextBox 3"/>
+          <p:cNvSpPr txBox="1"/>
+          <p:nvPr/>
+        </p:nvSpPr>
+        <p:spPr>
+          <a:xfrm>
+            <a:off x="640080" y="4128516"/>
+            <a:ext cx="10911535" cy="310896"/>
+          </a:xfrm>
+          <a:prstGeom prst="rect">
+            <a:avLst/>
+          </a:prstGeom>
+          <a:noFill/>
+        </p:spPr>
+        <p:txBody>
+          <a:bodyPr wrap="square">
+            <a:spAutoFit/>
+          </a:bodyPr>
+          <a:lstStyle/>
+          <a:p>
+            <a:pPr algn="ctr"/>
+            <a:r>
+              <a:rPr sz="2000" b="0" i="0">
+                <a:solidFill>
+                  <a:srgbClr val="828282"/>
                 </a:solidFill>
                 <a:latin typeface="Arial"/>
               </a:rPr>
@@ -6809,66 +6109,31 @@
       </p:sp>
       <p:sp>
         <p:nvSpPr>
-          <p:cNvPr id="4" name="TextBox 3"/>
-          <p:cNvSpPr txBox="1"/>
-          <p:nvPr/>
-        </p:nvSpPr>
-        <p:spPr>
-          <a:xfrm>
-            <a:off x="594360" y="3529584"/>
-            <a:ext cx="11002975" cy="685800"/>
-          </a:xfrm>
-          <a:prstGeom prst="rect">
-            <a:avLst/>
-          </a:prstGeom>
-          <a:noFill/>
-        </p:spPr>
-        <p:txBody>
-          <a:bodyPr wrap="square">
-            <a:spAutoFit/>
-          </a:bodyPr>
-          <a:lstStyle/>
-          <a:p>
-            <a:pPr algn="ctr"/>
-            <a:r>
-              <a:rPr sz="4400" b="1" i="0">
-                <a:solidFill>
-                  <a:srgbClr val="FFFFFF"/>
-                </a:solidFill>
-                <a:latin typeface="Arial"/>
-              </a:rPr>
-              <a:t>Pra cumprir a profecia</a:t>
-            </a:r>
-          </a:p>
-        </p:txBody>
-      </p:sp>
-      <p:sp>
-        <p:nvSpPr>
           <p:cNvPr id="5" name="TextBox 4"/>
           <p:cNvSpPr txBox="1"/>
           <p:nvPr/>
         </p:nvSpPr>
         <p:spPr>
           <a:xfrm>
-            <a:off x="594360" y="4251960"/>
-            <a:ext cx="11002975" cy="347472"/>
-          </a:xfrm>
-          <a:prstGeom prst="rect">
-            <a:avLst/>
-          </a:prstGeom>
-          <a:noFill/>
-        </p:spPr>
-        <p:txBody>
-          <a:bodyPr wrap="square">
-            <a:spAutoFit/>
-          </a:bodyPr>
-          <a:lstStyle/>
-          <a:p>
-            <a:pPr algn="ctr"/>
-            <a:r>
-              <a:rPr sz="2200" b="0" i="1">
-                <a:solidFill>
-                  <a:srgbClr val="8C8C8C"/>
+            <a:off x="640080" y="4494276"/>
+            <a:ext cx="10911535" cy="310896"/>
+          </a:xfrm>
+          <a:prstGeom prst="rect">
+            <a:avLst/>
+          </a:prstGeom>
+          <a:noFill/>
+        </p:spPr>
+        <p:txBody>
+          <a:bodyPr wrap="square">
+            <a:spAutoFit/>
+          </a:bodyPr>
+          <a:lstStyle/>
+          <a:p>
+            <a:pPr algn="ctr"/>
+            <a:r>
+              <a:rPr sz="2000" b="0" i="0">
+                <a:solidFill>
+                  <a:srgbClr val="828282"/>
                 </a:solidFill>
                 <a:latin typeface="Arial"/>
               </a:rPr>
@@ -6911,23 +6176,23 @@
         </p:nvSpPr>
         <p:spPr>
           <a:xfrm>
-            <a:off x="594360" y="2258568"/>
-            <a:ext cx="11002975" cy="685800"/>
-          </a:xfrm>
-          <a:prstGeom prst="rect">
-            <a:avLst/>
-          </a:prstGeom>
-          <a:noFill/>
-        </p:spPr>
-        <p:txBody>
-          <a:bodyPr wrap="square">
-            <a:spAutoFit/>
-          </a:bodyPr>
-          <a:lstStyle/>
-          <a:p>
-            <a:pPr algn="ctr"/>
-            <a:r>
-              <a:rPr sz="4400" b="1" i="0">
+            <a:off x="640080" y="2052828"/>
+            <a:ext cx="10911535" cy="731520"/>
+          </a:xfrm>
+          <a:prstGeom prst="rect">
+            <a:avLst/>
+          </a:prstGeom>
+          <a:noFill/>
+        </p:spPr>
+        <p:txBody>
+          <a:bodyPr wrap="square">
+            <a:spAutoFit/>
+          </a:bodyPr>
+          <a:lstStyle/>
+          <a:p>
+            <a:pPr algn="ctr"/>
+            <a:r>
+              <a:rPr sz="4800" b="1" i="0">
                 <a:solidFill>
                   <a:srgbClr val="FFFFFF"/>
                 </a:solidFill>
@@ -6946,99 +6211,29 @@
         </p:nvSpPr>
         <p:spPr>
           <a:xfrm>
-            <a:off x="594360" y="2980944"/>
-            <a:ext cx="11002975" cy="347472"/>
-          </a:xfrm>
-          <a:prstGeom prst="rect">
-            <a:avLst/>
-          </a:prstGeom>
-          <a:noFill/>
-        </p:spPr>
-        <p:txBody>
-          <a:bodyPr wrap="square">
-            <a:spAutoFit/>
-          </a:bodyPr>
-          <a:lstStyle/>
-          <a:p>
-            <a:pPr algn="ctr"/>
-            <a:r>
-              <a:rPr sz="2200" b="0" i="1">
-                <a:solidFill>
-                  <a:srgbClr val="8C8C8C"/>
-                </a:solidFill>
-                <a:latin typeface="Arial"/>
-              </a:rPr>
-              <a:t/>
-            </a:r>
-          </a:p>
-        </p:txBody>
-      </p:sp>
-      <p:sp>
-        <p:nvSpPr>
-          <p:cNvPr id="4" name="TextBox 3"/>
-          <p:cNvSpPr txBox="1"/>
-          <p:nvPr/>
-        </p:nvSpPr>
-        <p:spPr>
-          <a:xfrm>
-            <a:off x="594360" y="3529584"/>
-            <a:ext cx="11002975" cy="685800"/>
-          </a:xfrm>
-          <a:prstGeom prst="rect">
-            <a:avLst/>
-          </a:prstGeom>
-          <a:noFill/>
-        </p:spPr>
-        <p:txBody>
-          <a:bodyPr wrap="square">
-            <a:spAutoFit/>
-          </a:bodyPr>
-          <a:lstStyle/>
-          <a:p>
-            <a:pPr algn="ctr"/>
-            <a:r>
-              <a:rPr sz="4400" b="1" i="0">
+            <a:off x="640080" y="2985516"/>
+            <a:ext cx="10911535" cy="731520"/>
+          </a:xfrm>
+          <a:prstGeom prst="rect">
+            <a:avLst/>
+          </a:prstGeom>
+          <a:noFill/>
+        </p:spPr>
+        <p:txBody>
+          <a:bodyPr wrap="square">
+            <a:spAutoFit/>
+          </a:bodyPr>
+          <a:lstStyle/>
+          <a:p>
+            <a:pPr algn="ctr"/>
+            <a:r>
+              <a:rPr sz="4800" b="1" i="0">
                 <a:solidFill>
                   <a:srgbClr val="FFFFFF"/>
                 </a:solidFill>
                 <a:latin typeface="Arial"/>
               </a:rPr>
               <a:t>O Filho de Deus, o Salvador</a:t>
-            </a:r>
-          </a:p>
-        </p:txBody>
-      </p:sp>
-      <p:sp>
-        <p:nvSpPr>
-          <p:cNvPr id="5" name="TextBox 4"/>
-          <p:cNvSpPr txBox="1"/>
-          <p:nvPr/>
-        </p:nvSpPr>
-        <p:spPr>
-          <a:xfrm>
-            <a:off x="594360" y="4251960"/>
-            <a:ext cx="11002975" cy="347472"/>
-          </a:xfrm>
-          <a:prstGeom prst="rect">
-            <a:avLst/>
-          </a:prstGeom>
-          <a:noFill/>
-        </p:spPr>
-        <p:txBody>
-          <a:bodyPr wrap="square">
-            <a:spAutoFit/>
-          </a:bodyPr>
-          <a:lstStyle/>
-          <a:p>
-            <a:pPr algn="ctr"/>
-            <a:r>
-              <a:rPr sz="2200" b="0" i="1">
-                <a:solidFill>
-                  <a:srgbClr val="8C8C8C"/>
-                </a:solidFill>
-                <a:latin typeface="Arial"/>
-              </a:rPr>
-              <a:t/>
             </a:r>
           </a:p>
         </p:txBody>
@@ -7077,23 +6272,23 @@
         </p:nvSpPr>
         <p:spPr>
           <a:xfrm>
-            <a:off x="594360" y="2258568"/>
-            <a:ext cx="11002975" cy="685800"/>
-          </a:xfrm>
-          <a:prstGeom prst="rect">
-            <a:avLst/>
-          </a:prstGeom>
-          <a:noFill/>
-        </p:spPr>
-        <p:txBody>
-          <a:bodyPr wrap="square">
-            <a:spAutoFit/>
-          </a:bodyPr>
-          <a:lstStyle/>
-          <a:p>
-            <a:pPr algn="ctr"/>
-            <a:r>
-              <a:rPr sz="4400" b="1" i="0">
+            <a:off x="640080" y="2052828"/>
+            <a:ext cx="10911535" cy="731520"/>
+          </a:xfrm>
+          <a:prstGeom prst="rect">
+            <a:avLst/>
+          </a:prstGeom>
+          <a:noFill/>
+        </p:spPr>
+        <p:txBody>
+          <a:bodyPr wrap="square">
+            <a:spAutoFit/>
+          </a:bodyPr>
+          <a:lstStyle/>
+          <a:p>
+            <a:pPr algn="ctr"/>
+            <a:r>
+              <a:rPr sz="4800" b="1" i="0">
                 <a:solidFill>
                   <a:srgbClr val="FFFFFF"/>
                 </a:solidFill>
@@ -7112,99 +6307,29 @@
         </p:nvSpPr>
         <p:spPr>
           <a:xfrm>
-            <a:off x="594360" y="2980944"/>
-            <a:ext cx="11002975" cy="347472"/>
-          </a:xfrm>
-          <a:prstGeom prst="rect">
-            <a:avLst/>
-          </a:prstGeom>
-          <a:noFill/>
-        </p:spPr>
-        <p:txBody>
-          <a:bodyPr wrap="square">
-            <a:spAutoFit/>
-          </a:bodyPr>
-          <a:lstStyle/>
-          <a:p>
-            <a:pPr algn="ctr"/>
-            <a:r>
-              <a:rPr sz="2200" b="0" i="1">
-                <a:solidFill>
-                  <a:srgbClr val="8C8C8C"/>
-                </a:solidFill>
-                <a:latin typeface="Arial"/>
-              </a:rPr>
-              <a:t/>
-            </a:r>
-          </a:p>
-        </p:txBody>
-      </p:sp>
-      <p:sp>
-        <p:nvSpPr>
-          <p:cNvPr id="4" name="TextBox 3"/>
-          <p:cNvSpPr txBox="1"/>
-          <p:nvPr/>
-        </p:nvSpPr>
-        <p:spPr>
-          <a:xfrm>
-            <a:off x="594360" y="3529584"/>
-            <a:ext cx="11002975" cy="685800"/>
-          </a:xfrm>
-          <a:prstGeom prst="rect">
-            <a:avLst/>
-          </a:prstGeom>
-          <a:noFill/>
-        </p:spPr>
-        <p:txBody>
-          <a:bodyPr wrap="square">
-            <a:spAutoFit/>
-          </a:bodyPr>
-          <a:lstStyle/>
-          <a:p>
-            <a:pPr algn="ctr"/>
-            <a:r>
-              <a:rPr sz="4400" b="1" i="0">
+            <a:off x="640080" y="2985516"/>
+            <a:ext cx="10911535" cy="731520"/>
+          </a:xfrm>
+          <a:prstGeom prst="rect">
+            <a:avLst/>
+          </a:prstGeom>
+          <a:noFill/>
+        </p:spPr>
+        <p:txBody>
+          <a:bodyPr wrap="square">
+            <a:spAutoFit/>
+          </a:bodyPr>
+          <a:lstStyle/>
+          <a:p>
+            <a:pPr algn="ctr"/>
+            <a:r>
+              <a:rPr sz="4800" b="1" i="0">
                 <a:solidFill>
                   <a:srgbClr val="FFFFFF"/>
                 </a:solidFill>
                 <a:latin typeface="Arial"/>
               </a:rPr>
               <a:t>Rei dos reis</a:t>
-            </a:r>
-          </a:p>
-        </p:txBody>
-      </p:sp>
-      <p:sp>
-        <p:nvSpPr>
-          <p:cNvPr id="5" name="TextBox 4"/>
-          <p:cNvSpPr txBox="1"/>
-          <p:nvPr/>
-        </p:nvSpPr>
-        <p:spPr>
-          <a:xfrm>
-            <a:off x="594360" y="4251960"/>
-            <a:ext cx="11002975" cy="347472"/>
-          </a:xfrm>
-          <a:prstGeom prst="rect">
-            <a:avLst/>
-          </a:prstGeom>
-          <a:noFill/>
-        </p:spPr>
-        <p:txBody>
-          <a:bodyPr wrap="square">
-            <a:spAutoFit/>
-          </a:bodyPr>
-          <a:lstStyle/>
-          <a:p>
-            <a:pPr algn="ctr"/>
-            <a:r>
-              <a:rPr sz="2200" b="0" i="1">
-                <a:solidFill>
-                  <a:srgbClr val="8C8C8C"/>
-                </a:solidFill>
-                <a:latin typeface="Arial"/>
-              </a:rPr>
-              <a:t/>
             </a:r>
           </a:p>
         </p:txBody>
@@ -7243,23 +6368,23 @@
         </p:nvSpPr>
         <p:spPr>
           <a:xfrm>
-            <a:off x="594360" y="2258568"/>
-            <a:ext cx="11002975" cy="685800"/>
-          </a:xfrm>
-          <a:prstGeom prst="rect">
-            <a:avLst/>
-          </a:prstGeom>
-          <a:noFill/>
-        </p:spPr>
-        <p:txBody>
-          <a:bodyPr wrap="square">
-            <a:spAutoFit/>
-          </a:bodyPr>
-          <a:lstStyle/>
-          <a:p>
-            <a:pPr algn="ctr"/>
-            <a:r>
-              <a:rPr sz="4400" b="1" i="0">
+            <a:off x="640080" y="2052828"/>
+            <a:ext cx="10911535" cy="731520"/>
+          </a:xfrm>
+          <a:prstGeom prst="rect">
+            <a:avLst/>
+          </a:prstGeom>
+          <a:noFill/>
+        </p:spPr>
+        <p:txBody>
+          <a:bodyPr wrap="square">
+            <a:spAutoFit/>
+          </a:bodyPr>
+          <a:lstStyle/>
+          <a:p>
+            <a:pPr algn="ctr"/>
+            <a:r>
+              <a:rPr sz="4800" b="1" i="0">
                 <a:solidFill>
                   <a:srgbClr val="FFFFFF"/>
                 </a:solidFill>
@@ -7278,25 +6403,60 @@
         </p:nvSpPr>
         <p:spPr>
           <a:xfrm>
-            <a:off x="594360" y="2980944"/>
-            <a:ext cx="11002975" cy="347472"/>
-          </a:xfrm>
-          <a:prstGeom prst="rect">
-            <a:avLst/>
-          </a:prstGeom>
-          <a:noFill/>
-        </p:spPr>
-        <p:txBody>
-          <a:bodyPr wrap="square">
-            <a:spAutoFit/>
-          </a:bodyPr>
-          <a:lstStyle/>
-          <a:p>
-            <a:pPr algn="ctr"/>
-            <a:r>
-              <a:rPr sz="2200" b="0" i="1">
-                <a:solidFill>
-                  <a:srgbClr val="8C8C8C"/>
+            <a:off x="640080" y="2985516"/>
+            <a:ext cx="10911535" cy="731520"/>
+          </a:xfrm>
+          <a:prstGeom prst="rect">
+            <a:avLst/>
+          </a:prstGeom>
+          <a:noFill/>
+        </p:spPr>
+        <p:txBody>
+          <a:bodyPr wrap="square">
+            <a:spAutoFit/>
+          </a:bodyPr>
+          <a:lstStyle/>
+          <a:p>
+            <a:pPr algn="ctr"/>
+            <a:r>
+              <a:rPr sz="4800" b="1" i="0">
+                <a:solidFill>
+                  <a:srgbClr val="FFFFFF"/>
+                </a:solidFill>
+                <a:latin typeface="Arial"/>
+              </a:rPr>
+              <a:t>Aleluia</a:t>
+            </a:r>
+          </a:p>
+        </p:txBody>
+      </p:sp>
+      <p:sp>
+        <p:nvSpPr>
+          <p:cNvPr id="4" name="TextBox 3"/>
+          <p:cNvSpPr txBox="1"/>
+          <p:nvPr/>
+        </p:nvSpPr>
+        <p:spPr>
+          <a:xfrm>
+            <a:off x="640080" y="4128516"/>
+            <a:ext cx="10911535" cy="310896"/>
+          </a:xfrm>
+          <a:prstGeom prst="rect">
+            <a:avLst/>
+          </a:prstGeom>
+          <a:noFill/>
+        </p:spPr>
+        <p:txBody>
+          <a:bodyPr wrap="square">
+            <a:spAutoFit/>
+          </a:bodyPr>
+          <a:lstStyle/>
+          <a:p>
+            <a:pPr algn="ctr"/>
+            <a:r>
+              <a:rPr sz="2000" b="0" i="0">
+                <a:solidFill>
+                  <a:srgbClr val="828282"/>
                 </a:solidFill>
                 <a:latin typeface="Arial"/>
               </a:rPr>
@@ -7307,66 +6467,31 @@
       </p:sp>
       <p:sp>
         <p:nvSpPr>
-          <p:cNvPr id="4" name="TextBox 3"/>
-          <p:cNvSpPr txBox="1"/>
-          <p:nvPr/>
-        </p:nvSpPr>
-        <p:spPr>
-          <a:xfrm>
-            <a:off x="594360" y="3529584"/>
-            <a:ext cx="11002975" cy="685800"/>
-          </a:xfrm>
-          <a:prstGeom prst="rect">
-            <a:avLst/>
-          </a:prstGeom>
-          <a:noFill/>
-        </p:spPr>
-        <p:txBody>
-          <a:bodyPr wrap="square">
-            <a:spAutoFit/>
-          </a:bodyPr>
-          <a:lstStyle/>
-          <a:p>
-            <a:pPr algn="ctr"/>
-            <a:r>
-              <a:rPr sz="4400" b="1" i="0">
-                <a:solidFill>
-                  <a:srgbClr val="FFFFFF"/>
-                </a:solidFill>
-                <a:latin typeface="Arial"/>
-              </a:rPr>
-              <a:t>Aleluia</a:t>
-            </a:r>
-          </a:p>
-        </p:txBody>
-      </p:sp>
-      <p:sp>
-        <p:nvSpPr>
           <p:cNvPr id="5" name="TextBox 4"/>
           <p:cNvSpPr txBox="1"/>
           <p:nvPr/>
         </p:nvSpPr>
         <p:spPr>
           <a:xfrm>
-            <a:off x="594360" y="4251960"/>
-            <a:ext cx="11002975" cy="347472"/>
-          </a:xfrm>
-          <a:prstGeom prst="rect">
-            <a:avLst/>
-          </a:prstGeom>
-          <a:noFill/>
-        </p:spPr>
-        <p:txBody>
-          <a:bodyPr wrap="square">
-            <a:spAutoFit/>
-          </a:bodyPr>
-          <a:lstStyle/>
-          <a:p>
-            <a:pPr algn="ctr"/>
-            <a:r>
-              <a:rPr sz="2200" b="0" i="1">
-                <a:solidFill>
-                  <a:srgbClr val="8C8C8C"/>
+            <a:off x="640080" y="4494276"/>
+            <a:ext cx="10911535" cy="310896"/>
+          </a:xfrm>
+          <a:prstGeom prst="rect">
+            <a:avLst/>
+          </a:prstGeom>
+          <a:noFill/>
+        </p:spPr>
+        <p:txBody>
+          <a:bodyPr wrap="square">
+            <a:spAutoFit/>
+          </a:bodyPr>
+          <a:lstStyle/>
+          <a:p>
+            <a:pPr algn="ctr"/>
+            <a:r>
+              <a:rPr sz="2000" b="0" i="0">
+                <a:solidFill>
+                  <a:srgbClr val="828282"/>
                 </a:solidFill>
                 <a:latin typeface="Arial"/>
               </a:rPr>
@@ -7409,23 +6534,23 @@
         </p:nvSpPr>
         <p:spPr>
           <a:xfrm>
-            <a:off x="594360" y="2258568"/>
-            <a:ext cx="11002975" cy="685800"/>
-          </a:xfrm>
-          <a:prstGeom prst="rect">
-            <a:avLst/>
-          </a:prstGeom>
-          <a:noFill/>
-        </p:spPr>
-        <p:txBody>
-          <a:bodyPr wrap="square">
-            <a:spAutoFit/>
-          </a:bodyPr>
-          <a:lstStyle/>
-          <a:p>
-            <a:pPr algn="ctr"/>
-            <a:r>
-              <a:rPr sz="4400" b="1" i="0">
+            <a:off x="640080" y="2052828"/>
+            <a:ext cx="10911535" cy="731520"/>
+          </a:xfrm>
+          <a:prstGeom prst="rect">
+            <a:avLst/>
+          </a:prstGeom>
+          <a:noFill/>
+        </p:spPr>
+        <p:txBody>
+          <a:bodyPr wrap="square">
+            <a:spAutoFit/>
+          </a:bodyPr>
+          <a:lstStyle/>
+          <a:p>
+            <a:pPr algn="ctr"/>
+            <a:r>
+              <a:rPr sz="4800" b="1" i="0">
                 <a:solidFill>
                   <a:srgbClr val="FFFFFF"/>
                 </a:solidFill>
@@ -7444,25 +6569,60 @@
         </p:nvSpPr>
         <p:spPr>
           <a:xfrm>
-            <a:off x="594360" y="2980944"/>
-            <a:ext cx="11002975" cy="347472"/>
-          </a:xfrm>
-          <a:prstGeom prst="rect">
-            <a:avLst/>
-          </a:prstGeom>
-          <a:noFill/>
-        </p:spPr>
-        <p:txBody>
-          <a:bodyPr wrap="square">
-            <a:spAutoFit/>
-          </a:bodyPr>
-          <a:lstStyle/>
-          <a:p>
-            <a:pPr algn="ctr"/>
-            <a:r>
-              <a:rPr sz="2200" b="0" i="1">
-                <a:solidFill>
-                  <a:srgbClr val="8C8C8C"/>
+            <a:off x="640080" y="2985516"/>
+            <a:ext cx="10911535" cy="731520"/>
+          </a:xfrm>
+          <a:prstGeom prst="rect">
+            <a:avLst/>
+          </a:prstGeom>
+          <a:noFill/>
+        </p:spPr>
+        <p:txBody>
+          <a:bodyPr wrap="square">
+            <a:spAutoFit/>
+          </a:bodyPr>
+          <a:lstStyle/>
+          <a:p>
+            <a:pPr algn="ctr"/>
+            <a:r>
+              <a:rPr sz="4800" b="1" i="0">
+                <a:solidFill>
+                  <a:srgbClr val="FFFFFF"/>
+                </a:solidFill>
+                <a:latin typeface="Arial"/>
+              </a:rPr>
+              <a:t>Senhor dos senhores</a:t>
+            </a:r>
+          </a:p>
+        </p:txBody>
+      </p:sp>
+      <p:sp>
+        <p:nvSpPr>
+          <p:cNvPr id="4" name="TextBox 3"/>
+          <p:cNvSpPr txBox="1"/>
+          <p:nvPr/>
+        </p:nvSpPr>
+        <p:spPr>
+          <a:xfrm>
+            <a:off x="640080" y="4128516"/>
+            <a:ext cx="10911535" cy="310896"/>
+          </a:xfrm>
+          <a:prstGeom prst="rect">
+            <a:avLst/>
+          </a:prstGeom>
+          <a:noFill/>
+        </p:spPr>
+        <p:txBody>
+          <a:bodyPr wrap="square">
+            <a:spAutoFit/>
+          </a:bodyPr>
+          <a:lstStyle/>
+          <a:p>
+            <a:pPr algn="ctr"/>
+            <a:r>
+              <a:rPr sz="2000" b="0" i="0">
+                <a:solidFill>
+                  <a:srgbClr val="828282"/>
                 </a:solidFill>
                 <a:latin typeface="Arial"/>
               </a:rPr>
@@ -7473,66 +6633,31 @@
       </p:sp>
       <p:sp>
         <p:nvSpPr>
-          <p:cNvPr id="4" name="TextBox 3"/>
-          <p:cNvSpPr txBox="1"/>
-          <p:nvPr/>
-        </p:nvSpPr>
-        <p:spPr>
-          <a:xfrm>
-            <a:off x="594360" y="3529584"/>
-            <a:ext cx="11002975" cy="685800"/>
-          </a:xfrm>
-          <a:prstGeom prst="rect">
-            <a:avLst/>
-          </a:prstGeom>
-          <a:noFill/>
-        </p:spPr>
-        <p:txBody>
-          <a:bodyPr wrap="square">
-            <a:spAutoFit/>
-          </a:bodyPr>
-          <a:lstStyle/>
-          <a:p>
-            <a:pPr algn="ctr"/>
-            <a:r>
-              <a:rPr sz="4400" b="1" i="0">
-                <a:solidFill>
-                  <a:srgbClr val="FFFFFF"/>
-                </a:solidFill>
-                <a:latin typeface="Arial"/>
-              </a:rPr>
-              <a:t>Senhor dos senhores</a:t>
-            </a:r>
-          </a:p>
-        </p:txBody>
-      </p:sp>
-      <p:sp>
-        <p:nvSpPr>
           <p:cNvPr id="5" name="TextBox 4"/>
           <p:cNvSpPr txBox="1"/>
           <p:nvPr/>
         </p:nvSpPr>
         <p:spPr>
           <a:xfrm>
-            <a:off x="594360" y="4251960"/>
-            <a:ext cx="11002975" cy="347472"/>
-          </a:xfrm>
-          <a:prstGeom prst="rect">
-            <a:avLst/>
-          </a:prstGeom>
-          <a:noFill/>
-        </p:spPr>
-        <p:txBody>
-          <a:bodyPr wrap="square">
-            <a:spAutoFit/>
-          </a:bodyPr>
-          <a:lstStyle/>
-          <a:p>
-            <a:pPr algn="ctr"/>
-            <a:r>
-              <a:rPr sz="2200" b="0" i="1">
-                <a:solidFill>
-                  <a:srgbClr val="8C8C8C"/>
+            <a:off x="640080" y="4494276"/>
+            <a:ext cx="10911535" cy="310896"/>
+          </a:xfrm>
+          <a:prstGeom prst="rect">
+            <a:avLst/>
+          </a:prstGeom>
+          <a:noFill/>
+        </p:spPr>
+        <p:txBody>
+          <a:bodyPr wrap="square">
+            <a:spAutoFit/>
+          </a:bodyPr>
+          <a:lstStyle/>
+          <a:p>
+            <a:pPr algn="ctr"/>
+            <a:r>
+              <a:rPr sz="2000" b="0" i="0">
+                <a:solidFill>
+                  <a:srgbClr val="828282"/>
                 </a:solidFill>
                 <a:latin typeface="Arial"/>
               </a:rPr>
@@ -7575,64 +6700,29 @@
         </p:nvSpPr>
         <p:spPr>
           <a:xfrm>
-            <a:off x="594360" y="2894076"/>
-            <a:ext cx="11002975" cy="685800"/>
-          </a:xfrm>
-          <a:prstGeom prst="rect">
-            <a:avLst/>
-          </a:prstGeom>
-          <a:noFill/>
-        </p:spPr>
-        <p:txBody>
-          <a:bodyPr wrap="square">
-            <a:spAutoFit/>
-          </a:bodyPr>
-          <a:lstStyle/>
-          <a:p>
-            <a:pPr algn="ctr"/>
-            <a:r>
-              <a:rPr sz="4400" b="1" i="0">
+            <a:off x="640080" y="2702052"/>
+            <a:ext cx="10911535" cy="731520"/>
+          </a:xfrm>
+          <a:prstGeom prst="rect">
+            <a:avLst/>
+          </a:prstGeom>
+          <a:noFill/>
+        </p:spPr>
+        <p:txBody>
+          <a:bodyPr wrap="square">
+            <a:spAutoFit/>
+          </a:bodyPr>
+          <a:lstStyle/>
+          <a:p>
+            <a:pPr algn="ctr"/>
+            <a:r>
+              <a:rPr sz="4800" b="1" i="0">
                 <a:solidFill>
                   <a:srgbClr val="FFFFFF"/>
                 </a:solidFill>
                 <a:latin typeface="Arial"/>
               </a:rPr>
               <a:t>Aleluia</a:t>
-            </a:r>
-          </a:p>
-        </p:txBody>
-      </p:sp>
-      <p:sp>
-        <p:nvSpPr>
-          <p:cNvPr id="3" name="TextBox 2"/>
-          <p:cNvSpPr txBox="1"/>
-          <p:nvPr/>
-        </p:nvSpPr>
-        <p:spPr>
-          <a:xfrm>
-            <a:off x="594360" y="3616452"/>
-            <a:ext cx="11002975" cy="347472"/>
-          </a:xfrm>
-          <a:prstGeom prst="rect">
-            <a:avLst/>
-          </a:prstGeom>
-          <a:noFill/>
-        </p:spPr>
-        <p:txBody>
-          <a:bodyPr wrap="square">
-            <a:spAutoFit/>
-          </a:bodyPr>
-          <a:lstStyle/>
-          <a:p>
-            <a:pPr algn="ctr"/>
-            <a:r>
-              <a:rPr sz="2200" b="0" i="1">
-                <a:solidFill>
-                  <a:srgbClr val="8C8C8C"/>
-                </a:solidFill>
-                <a:latin typeface="Arial"/>
-              </a:rPr>
-              <a:t/>
             </a:r>
           </a:p>
         </p:txBody>

--- a/output_pptx/King_Of_Kings.pptx
+++ b/output_pptx/King_Of_Kings.pptx
@@ -3425,6 +3425,76 @@
           </a:p>
         </p:txBody>
       </p:sp>
+      <p:sp>
+        <p:nvSpPr>
+          <p:cNvPr id="4" name="TextBox 3"/>
+          <p:cNvSpPr txBox="1"/>
+          <p:nvPr/>
+        </p:nvSpPr>
+        <p:spPr>
+          <a:xfrm>
+            <a:off x="640080" y="4128516"/>
+            <a:ext cx="10911535" cy="310896"/>
+          </a:xfrm>
+          <a:prstGeom prst="rect">
+            <a:avLst/>
+          </a:prstGeom>
+          <a:noFill/>
+        </p:spPr>
+        <p:txBody>
+          <a:bodyPr wrap="square">
+            <a:spAutoFit/>
+          </a:bodyPr>
+          <a:lstStyle/>
+          <a:p>
+            <a:pPr algn="ctr"/>
+            <a:r>
+              <a:rPr sz="2000" b="0" i="0">
+                <a:solidFill>
+                  <a:srgbClr val="828282"/>
+                </a:solidFill>
+                <a:latin typeface="Arial"/>
+              </a:rPr>
+              <a:t>あなたの計画を明かすために</a:t>
+            </a:r>
+          </a:p>
+        </p:txBody>
+      </p:sp>
+      <p:sp>
+        <p:nvSpPr>
+          <p:cNvPr id="5" name="TextBox 4"/>
+          <p:cNvSpPr txBox="1"/>
+          <p:nvPr/>
+        </p:nvSpPr>
+        <p:spPr>
+          <a:xfrm>
+            <a:off x="640080" y="4494276"/>
+            <a:ext cx="10911535" cy="310896"/>
+          </a:xfrm>
+          <a:prstGeom prst="rect">
+            <a:avLst/>
+          </a:prstGeom>
+          <a:noFill/>
+        </p:spPr>
+        <p:txBody>
+          <a:bodyPr wrap="square">
+            <a:spAutoFit/>
+          </a:bodyPr>
+          <a:lstStyle/>
+          <a:p>
+            <a:pPr algn="ctr"/>
+            <a:r>
+              <a:rPr sz="2000" b="0" i="0">
+                <a:solidFill>
+                  <a:srgbClr val="828282"/>
+                </a:solidFill>
+                <a:latin typeface="Arial"/>
+              </a:rPr>
+              <a:t>神はご自分の子を遣わした</a:t>
+            </a:r>
+          </a:p>
+        </p:txBody>
+      </p:sp>
     </p:spTree>
   </p:cSld>
   <p:clrMapOvr>
@@ -3521,6 +3591,76 @@
           </a:p>
         </p:txBody>
       </p:sp>
+      <p:sp>
+        <p:nvSpPr>
+          <p:cNvPr id="4" name="TextBox 3"/>
+          <p:cNvSpPr txBox="1"/>
+          <p:nvPr/>
+        </p:nvSpPr>
+        <p:spPr>
+          <a:xfrm>
+            <a:off x="640080" y="4128516"/>
+            <a:ext cx="10911535" cy="310896"/>
+          </a:xfrm>
+          <a:prstGeom prst="rect">
+            <a:avLst/>
+          </a:prstGeom>
+          <a:noFill/>
+        </p:spPr>
+        <p:txBody>
+          <a:bodyPr wrap="square">
+            <a:spAutoFit/>
+          </a:bodyPr>
+          <a:lstStyle/>
+          <a:p>
+            <a:pPr algn="ctr"/>
+            <a:r>
+              <a:rPr sz="2000" b="0" i="0">
+                <a:solidFill>
+                  <a:srgbClr val="828282"/>
+                </a:solidFill>
+                <a:latin typeface="Arial"/>
+              </a:rPr>
+              <a:t>あなたの計画を明かすために</a:t>
+            </a:r>
+          </a:p>
+        </p:txBody>
+      </p:sp>
+      <p:sp>
+        <p:nvSpPr>
+          <p:cNvPr id="5" name="TextBox 4"/>
+          <p:cNvSpPr txBox="1"/>
+          <p:nvPr/>
+        </p:nvSpPr>
+        <p:spPr>
+          <a:xfrm>
+            <a:off x="640080" y="4494276"/>
+            <a:ext cx="10911535" cy="310896"/>
+          </a:xfrm>
+          <a:prstGeom prst="rect">
+            <a:avLst/>
+          </a:prstGeom>
+          <a:noFill/>
+        </p:spPr>
+        <p:txBody>
+          <a:bodyPr wrap="square">
+            <a:spAutoFit/>
+          </a:bodyPr>
+          <a:lstStyle/>
+          <a:p>
+            <a:pPr algn="ctr"/>
+            <a:r>
+              <a:rPr sz="2000" b="0" i="0">
+                <a:solidFill>
+                  <a:srgbClr val="828282"/>
+                </a:solidFill>
+                <a:latin typeface="Arial"/>
+              </a:rPr>
+              <a:t>神はご自分の子を遣わした</a:t>
+            </a:r>
+          </a:p>
+        </p:txBody>
+      </p:sp>
     </p:spTree>
   </p:cSld>
   <p:clrMapOvr>
@@ -3617,6 +3757,76 @@
           </a:p>
         </p:txBody>
       </p:sp>
+      <p:sp>
+        <p:nvSpPr>
+          <p:cNvPr id="4" name="TextBox 3"/>
+          <p:cNvSpPr txBox="1"/>
+          <p:nvPr/>
+        </p:nvSpPr>
+        <p:spPr>
+          <a:xfrm>
+            <a:off x="640080" y="4128516"/>
+            <a:ext cx="10911535" cy="310896"/>
+          </a:xfrm>
+          <a:prstGeom prst="rect">
+            <a:avLst/>
+          </a:prstGeom>
+          <a:noFill/>
+        </p:spPr>
+        <p:txBody>
+          <a:bodyPr wrap="square">
+            <a:spAutoFit/>
+          </a:bodyPr>
+          <a:lstStyle/>
+          <a:p>
+            <a:pPr algn="ctr"/>
+            <a:r>
+              <a:rPr sz="2000" b="0" i="0">
+                <a:solidFill>
+                  <a:srgbClr val="828282"/>
+                </a:solidFill>
+                <a:latin typeface="Arial"/>
+              </a:rPr>
+              <a:t>あなたの計画を明かすために</a:t>
+            </a:r>
+          </a:p>
+        </p:txBody>
+      </p:sp>
+      <p:sp>
+        <p:nvSpPr>
+          <p:cNvPr id="5" name="TextBox 4"/>
+          <p:cNvSpPr txBox="1"/>
+          <p:nvPr/>
+        </p:nvSpPr>
+        <p:spPr>
+          <a:xfrm>
+            <a:off x="640080" y="4494276"/>
+            <a:ext cx="10911535" cy="310896"/>
+          </a:xfrm>
+          <a:prstGeom prst="rect">
+            <a:avLst/>
+          </a:prstGeom>
+          <a:noFill/>
+        </p:spPr>
+        <p:txBody>
+          <a:bodyPr wrap="square">
+            <a:spAutoFit/>
+          </a:bodyPr>
+          <a:lstStyle/>
+          <a:p>
+            <a:pPr algn="ctr"/>
+            <a:r>
+              <a:rPr sz="2000" b="0" i="0">
+                <a:solidFill>
+                  <a:srgbClr val="828282"/>
+                </a:solidFill>
+                <a:latin typeface="Arial"/>
+              </a:rPr>
+              <a:t>神はご自分の子を遣わした</a:t>
+            </a:r>
+          </a:p>
+        </p:txBody>
+      </p:sp>
     </p:spTree>
   </p:cSld>
   <p:clrMapOvr>
@@ -3713,6 +3923,76 @@
           </a:p>
         </p:txBody>
       </p:sp>
+      <p:sp>
+        <p:nvSpPr>
+          <p:cNvPr id="4" name="TextBox 3"/>
+          <p:cNvSpPr txBox="1"/>
+          <p:nvPr/>
+        </p:nvSpPr>
+        <p:spPr>
+          <a:xfrm>
+            <a:off x="640080" y="4128516"/>
+            <a:ext cx="10911535" cy="310896"/>
+          </a:xfrm>
+          <a:prstGeom prst="rect">
+            <a:avLst/>
+          </a:prstGeom>
+          <a:noFill/>
+        </p:spPr>
+        <p:txBody>
+          <a:bodyPr wrap="square">
+            <a:spAutoFit/>
+          </a:bodyPr>
+          <a:lstStyle/>
+          <a:p>
+            <a:pPr algn="ctr"/>
+            <a:r>
+              <a:rPr sz="2000" b="0" i="0">
+                <a:solidFill>
+                  <a:srgbClr val="828282"/>
+                </a:solidFill>
+                <a:latin typeface="Arial"/>
+              </a:rPr>
+              <a:t>あなたの計画を明かすために</a:t>
+            </a:r>
+          </a:p>
+        </p:txBody>
+      </p:sp>
+      <p:sp>
+        <p:nvSpPr>
+          <p:cNvPr id="5" name="TextBox 4"/>
+          <p:cNvSpPr txBox="1"/>
+          <p:nvPr/>
+        </p:nvSpPr>
+        <p:spPr>
+          <a:xfrm>
+            <a:off x="640080" y="4494276"/>
+            <a:ext cx="10911535" cy="310896"/>
+          </a:xfrm>
+          <a:prstGeom prst="rect">
+            <a:avLst/>
+          </a:prstGeom>
+          <a:noFill/>
+        </p:spPr>
+        <p:txBody>
+          <a:bodyPr wrap="square">
+            <a:spAutoFit/>
+          </a:bodyPr>
+          <a:lstStyle/>
+          <a:p>
+            <a:pPr algn="ctr"/>
+            <a:r>
+              <a:rPr sz="2000" b="0" i="0">
+                <a:solidFill>
+                  <a:srgbClr val="828282"/>
+                </a:solidFill>
+                <a:latin typeface="Arial"/>
+              </a:rPr>
+              <a:t>神はご自分の子を遣わした</a:t>
+            </a:r>
+          </a:p>
+        </p:txBody>
+      </p:sp>
     </p:spTree>
   </p:cSld>
   <p:clrMapOvr>
@@ -3879,6 +4159,76 @@
           </a:p>
         </p:txBody>
       </p:sp>
+      <p:sp>
+        <p:nvSpPr>
+          <p:cNvPr id="6" name="TextBox 5"/>
+          <p:cNvSpPr txBox="1"/>
+          <p:nvPr/>
+        </p:nvSpPr>
+        <p:spPr>
+          <a:xfrm>
+            <a:off x="640080" y="4530852"/>
+            <a:ext cx="10911535" cy="310896"/>
+          </a:xfrm>
+          <a:prstGeom prst="rect">
+            <a:avLst/>
+          </a:prstGeom>
+          <a:noFill/>
+        </p:spPr>
+        <p:txBody>
+          <a:bodyPr wrap="square">
+            <a:spAutoFit/>
+          </a:bodyPr>
+          <a:lstStyle/>
+          <a:p>
+            <a:pPr algn="ctr"/>
+            <a:r>
+              <a:rPr sz="2000" b="0" i="1">
+                <a:solidFill>
+                  <a:srgbClr val="828282"/>
+                </a:solidFill>
+                <a:latin typeface="Arial"/>
+              </a:rPr>
+              <a:t>Para manifestar o reino de Deus e redimir</a:t>
+            </a:r>
+          </a:p>
+        </p:txBody>
+      </p:sp>
+      <p:sp>
+        <p:nvSpPr>
+          <p:cNvPr id="7" name="TextBox 6"/>
+          <p:cNvSpPr txBox="1"/>
+          <p:nvPr/>
+        </p:nvSpPr>
+        <p:spPr>
+          <a:xfrm>
+            <a:off x="640080" y="4896612"/>
+            <a:ext cx="10911535" cy="310896"/>
+          </a:xfrm>
+          <a:prstGeom prst="rect">
+            <a:avLst/>
+          </a:prstGeom>
+          <a:noFill/>
+        </p:spPr>
+        <p:txBody>
+          <a:bodyPr wrap="square">
+            <a:spAutoFit/>
+          </a:bodyPr>
+          <a:lstStyle/>
+          <a:p>
+            <a:pPr algn="ctr"/>
+            <a:r>
+              <a:rPr sz="2000" b="0" i="1">
+                <a:solidFill>
+                  <a:srgbClr val="828282"/>
+                </a:solidFill>
+                <a:latin typeface="Arial"/>
+              </a:rPr>
+              <a:t>Você não rejeitou a cruz</a:t>
+            </a:r>
+          </a:p>
+        </p:txBody>
+      </p:sp>
     </p:spTree>
   </p:cSld>
   <p:clrMapOvr>
@@ -4045,6 +4395,76 @@
           </a:p>
         </p:txBody>
       </p:sp>
+      <p:sp>
+        <p:nvSpPr>
+          <p:cNvPr id="6" name="TextBox 5"/>
+          <p:cNvSpPr txBox="1"/>
+          <p:nvPr/>
+        </p:nvSpPr>
+        <p:spPr>
+          <a:xfrm>
+            <a:off x="640080" y="4530852"/>
+            <a:ext cx="10911535" cy="310896"/>
+          </a:xfrm>
+          <a:prstGeom prst="rect">
+            <a:avLst/>
+          </a:prstGeom>
+          <a:noFill/>
+        </p:spPr>
+        <p:txBody>
+          <a:bodyPr wrap="square">
+            <a:spAutoFit/>
+          </a:bodyPr>
+          <a:lstStyle/>
+          <a:p>
+            <a:pPr algn="ctr"/>
+            <a:r>
+              <a:rPr sz="2000" b="0" i="1">
+                <a:solidFill>
+                  <a:srgbClr val="828282"/>
+                </a:solidFill>
+                <a:latin typeface="Arial"/>
+              </a:rPr>
+              <a:t>Em meio ao sofrimento, olhando para o futuro</a:t>
+            </a:r>
+          </a:p>
+        </p:txBody>
+      </p:sp>
+      <p:sp>
+        <p:nvSpPr>
+          <p:cNvPr id="7" name="TextBox 6"/>
+          <p:cNvSpPr txBox="1"/>
+          <p:nvPr/>
+        </p:nvSpPr>
+        <p:spPr>
+          <a:xfrm>
+            <a:off x="640080" y="4896612"/>
+            <a:ext cx="10911535" cy="310896"/>
+          </a:xfrm>
+          <a:prstGeom prst="rect">
+            <a:avLst/>
+          </a:prstGeom>
+          <a:noFill/>
+        </p:spPr>
+        <p:txBody>
+          <a:bodyPr wrap="square">
+            <a:spAutoFit/>
+          </a:bodyPr>
+          <a:lstStyle/>
+          <a:p>
+            <a:pPr algn="ctr"/>
+            <a:r>
+              <a:rPr sz="2000" b="0" i="1">
+                <a:solidFill>
+                  <a:srgbClr val="828282"/>
+                </a:solidFill>
+                <a:latin typeface="Arial"/>
+              </a:rPr>
+              <a:t>Jesus morreu para nos salvar</a:t>
+            </a:r>
+          </a:p>
+        </p:txBody>
+      </p:sp>
     </p:spTree>
   </p:cSld>
   <p:clrMapOvr>
@@ -4447,6 +4867,76 @@
           </a:p>
         </p:txBody>
       </p:sp>
+      <p:sp>
+        <p:nvSpPr>
+          <p:cNvPr id="6" name="TextBox 5"/>
+          <p:cNvSpPr txBox="1"/>
+          <p:nvPr/>
+        </p:nvSpPr>
+        <p:spPr>
+          <a:xfrm>
+            <a:off x="640080" y="4530852"/>
+            <a:ext cx="10911535" cy="310896"/>
+          </a:xfrm>
+          <a:prstGeom prst="rect">
+            <a:avLst/>
+          </a:prstGeom>
+          <a:noFill/>
+        </p:spPr>
+        <p:txBody>
+          <a:bodyPr wrap="square">
+            <a:spAutoFit/>
+          </a:bodyPr>
+          <a:lstStyle/>
+          <a:p>
+            <a:pPr algn="ctr"/>
+            <a:r>
+              <a:rPr sz="2000" b="0" i="1">
+                <a:solidFill>
+                  <a:srgbClr val="828282"/>
+                </a:solidFill>
+                <a:latin typeface="Arial"/>
+              </a:rPr>
+              <a:t>Na manhã da ressurreição, a pedra foi removida</a:t>
+            </a:r>
+          </a:p>
+        </p:txBody>
+      </p:sp>
+      <p:sp>
+        <p:nvSpPr>
+          <p:cNvPr id="7" name="TextBox 6"/>
+          <p:cNvSpPr txBox="1"/>
+          <p:nvPr/>
+        </p:nvSpPr>
+        <p:spPr>
+          <a:xfrm>
+            <a:off x="640080" y="4896612"/>
+            <a:ext cx="10911535" cy="310896"/>
+          </a:xfrm>
+          <a:prstGeom prst="rect">
+            <a:avLst/>
+          </a:prstGeom>
+          <a:noFill/>
+        </p:spPr>
+        <p:txBody>
+          <a:bodyPr wrap="square">
+            <a:spAutoFit/>
+          </a:bodyPr>
+          <a:lstStyle/>
+          <a:p>
+            <a:pPr algn="ctr"/>
+            <a:r>
+              <a:rPr sz="2000" b="0" i="1">
+                <a:solidFill>
+                  <a:srgbClr val="828282"/>
+                </a:solidFill>
+                <a:latin typeface="Arial"/>
+              </a:rPr>
+              <a:t>O Cordeiro quebrantou a morte</a:t>
+            </a:r>
+          </a:p>
+        </p:txBody>
+      </p:sp>
     </p:spTree>
   </p:cSld>
   <p:clrMapOvr>
@@ -4613,6 +5103,76 @@
           </a:p>
         </p:txBody>
       </p:sp>
+      <p:sp>
+        <p:nvSpPr>
+          <p:cNvPr id="6" name="TextBox 5"/>
+          <p:cNvSpPr txBox="1"/>
+          <p:nvPr/>
+        </p:nvSpPr>
+        <p:spPr>
+          <a:xfrm>
+            <a:off x="640080" y="4530852"/>
+            <a:ext cx="10911535" cy="310896"/>
+          </a:xfrm>
+          <a:prstGeom prst="rect">
+            <a:avLst/>
+          </a:prstGeom>
+          <a:noFill/>
+        </p:spPr>
+        <p:txBody>
+          <a:bodyPr wrap="square">
+            <a:spAutoFit/>
+          </a:bodyPr>
+          <a:lstStyle/>
+          <a:p>
+            <a:pPr algn="ctr"/>
+            <a:r>
+              <a:rPr sz="2000" b="0" i="1">
+                <a:solidFill>
+                  <a:srgbClr val="828282"/>
+                </a:solidFill>
+                <a:latin typeface="Arial"/>
+              </a:rPr>
+              <a:t>A alma adormecida foi libertada</a:t>
+            </a:r>
+          </a:p>
+        </p:txBody>
+      </p:sp>
+      <p:sp>
+        <p:nvSpPr>
+          <p:cNvPr id="7" name="TextBox 6"/>
+          <p:cNvSpPr txBox="1"/>
+          <p:nvPr/>
+        </p:nvSpPr>
+        <p:spPr>
+          <a:xfrm>
+            <a:off x="640080" y="4896612"/>
+            <a:ext cx="10911535" cy="310896"/>
+          </a:xfrm>
+          <a:prstGeom prst="rect">
+            <a:avLst/>
+          </a:prstGeom>
+          <a:noFill/>
+        </p:spPr>
+        <p:txBody>
+          <a:bodyPr wrap="square">
+            <a:spAutoFit/>
+          </a:bodyPr>
+          <a:lstStyle/>
+          <a:p>
+            <a:pPr algn="ctr"/>
+            <a:r>
+              <a:rPr sz="2000" b="0" i="1">
+                <a:solidFill>
+                  <a:srgbClr val="828282"/>
+                </a:solidFill>
+                <a:latin typeface="Arial"/>
+              </a:rPr>
+              <a:t>Retorna ao Pai e encontra paz</a:t>
+            </a:r>
+          </a:p>
+        </p:txBody>
+      </p:sp>
     </p:spTree>
   </p:cSld>
   <p:clrMapOvr>
@@ -4779,6 +5339,76 @@
           </a:p>
         </p:txBody>
       </p:sp>
+      <p:sp>
+        <p:nvSpPr>
+          <p:cNvPr id="6" name="TextBox 5"/>
+          <p:cNvSpPr txBox="1"/>
+          <p:nvPr/>
+        </p:nvSpPr>
+        <p:spPr>
+          <a:xfrm>
+            <a:off x="640080" y="4530852"/>
+            <a:ext cx="10911535" cy="310896"/>
+          </a:xfrm>
+          <a:prstGeom prst="rect">
+            <a:avLst/>
+          </a:prstGeom>
+          <a:noFill/>
+        </p:spPr>
+        <p:txBody>
+          <a:bodyPr wrap="square">
+            <a:spAutoFit/>
+          </a:bodyPr>
+          <a:lstStyle/>
+          <a:p>
+            <a:pPr algn="ctr"/>
+            <a:r>
+              <a:rPr sz="2000" b="0" i="1">
+                <a:solidFill>
+                  <a:srgbClr val="828282"/>
+                </a:solidFill>
+                <a:latin typeface="Arial"/>
+              </a:rPr>
+              <a:t>A Igreja nasceu, o Espírito queima</a:t>
+            </a:r>
+          </a:p>
+        </p:txBody>
+      </p:sp>
+      <p:sp>
+        <p:nvSpPr>
+          <p:cNvPr id="7" name="TextBox 6"/>
+          <p:cNvSpPr txBox="1"/>
+          <p:nvPr/>
+        </p:nvSpPr>
+        <p:spPr>
+          <a:xfrm>
+            <a:off x="640080" y="4896612"/>
+            <a:ext cx="10911535" cy="310896"/>
+          </a:xfrm>
+          <a:prstGeom prst="rect">
+            <a:avLst/>
+          </a:prstGeom>
+          <a:noFill/>
+        </p:spPr>
+        <p:txBody>
+          <a:bodyPr wrap="square">
+            <a:spAutoFit/>
+          </a:bodyPr>
+          <a:lstStyle/>
+          <a:p>
+            <a:pPr algn="ctr"/>
+            <a:r>
+              <a:rPr sz="2000" b="0" i="1">
+                <a:solidFill>
+                  <a:srgbClr val="828282"/>
+                </a:solidFill>
+                <a:latin typeface="Arial"/>
+              </a:rPr>
+              <a:t>Hoje o evangelho brilha forte</a:t>
+            </a:r>
+          </a:p>
+        </p:txBody>
+      </p:sp>
     </p:spTree>
   </p:cSld>
   <p:clrMapOvr>
@@ -5181,6 +5811,76 @@
           </a:p>
         </p:txBody>
       </p:sp>
+      <p:sp>
+        <p:nvSpPr>
+          <p:cNvPr id="6" name="TextBox 5"/>
+          <p:cNvSpPr txBox="1"/>
+          <p:nvPr/>
+        </p:nvSpPr>
+        <p:spPr>
+          <a:xfrm>
+            <a:off x="640080" y="4530852"/>
+            <a:ext cx="10911535" cy="310896"/>
+          </a:xfrm>
+          <a:prstGeom prst="rect">
+            <a:avLst/>
+          </a:prstGeom>
+          <a:noFill/>
+        </p:spPr>
+        <p:txBody>
+          <a:bodyPr wrap="square">
+            <a:spAutoFit/>
+          </a:bodyPr>
+          <a:lstStyle/>
+          <a:p>
+            <a:pPr algn="ctr"/>
+            <a:r>
+              <a:rPr sz="2000" b="0" i="1">
+                <a:solidFill>
+                  <a:srgbClr val="828282"/>
+                </a:solidFill>
+                <a:latin typeface="Arial"/>
+              </a:rPr>
+              <a:t>Pela morte de Jesus, fomos libertos</a:t>
+            </a:r>
+          </a:p>
+        </p:txBody>
+      </p:sp>
+      <p:sp>
+        <p:nvSpPr>
+          <p:cNvPr id="7" name="TextBox 6"/>
+          <p:cNvSpPr txBox="1"/>
+          <p:nvPr/>
+        </p:nvSpPr>
+        <p:spPr>
+          <a:xfrm>
+            <a:off x="640080" y="4896612"/>
+            <a:ext cx="10911535" cy="310896"/>
+          </a:xfrm>
+          <a:prstGeom prst="rect">
+            <a:avLst/>
+          </a:prstGeom>
+          <a:noFill/>
+        </p:spPr>
+        <p:txBody>
+          <a:bodyPr wrap="square">
+            <a:spAutoFit/>
+          </a:bodyPr>
+          <a:lstStyle/>
+          <a:p>
+            <a:pPr algn="ctr"/>
+            <a:r>
+              <a:rPr sz="2000" b="0" i="1">
+                <a:solidFill>
+                  <a:srgbClr val="828282"/>
+                </a:solidFill>
+                <a:latin typeface="Arial"/>
+              </a:rPr>
+              <a:t>O amor de Cristo nos deu vida</a:t>
+            </a:r>
+          </a:p>
+        </p:txBody>
+      </p:sp>
     </p:spTree>
   </p:cSld>
   <p:clrMapOvr>
@@ -5810,6 +6510,41 @@
           </a:p>
         </p:txBody>
       </p:sp>
+      <p:sp>
+        <p:nvSpPr>
+          <p:cNvPr id="3" name="TextBox 2"/>
+          <p:cNvSpPr txBox="1"/>
+          <p:nvPr/>
+        </p:nvSpPr>
+        <p:spPr>
+          <a:xfrm>
+            <a:off x="640080" y="3845052"/>
+            <a:ext cx="10911535" cy="310896"/>
+          </a:xfrm>
+          <a:prstGeom prst="rect">
+            <a:avLst/>
+          </a:prstGeom>
+          <a:noFill/>
+        </p:spPr>
+        <p:txBody>
+          <a:bodyPr wrap="square">
+            <a:spAutoFit/>
+          </a:bodyPr>
+          <a:lstStyle/>
+          <a:p>
+            <a:pPr algn="ctr"/>
+            <a:r>
+              <a:rPr sz="2000" b="0" i="0">
+                <a:solidFill>
+                  <a:srgbClr val="828282"/>
+                </a:solidFill>
+                <a:latin typeface="Arial"/>
+              </a:rPr>
+              <a:t>アレルヤ</a:t>
+            </a:r>
+          </a:p>
+        </p:txBody>
+      </p:sp>
     </p:spTree>
   </p:cSld>
   <p:clrMapOvr>
@@ -6238,6 +6973,76 @@
           </a:p>
         </p:txBody>
       </p:sp>
+      <p:sp>
+        <p:nvSpPr>
+          <p:cNvPr id="4" name="TextBox 3"/>
+          <p:cNvSpPr txBox="1"/>
+          <p:nvPr/>
+        </p:nvSpPr>
+        <p:spPr>
+          <a:xfrm>
+            <a:off x="640080" y="4128516"/>
+            <a:ext cx="10911535" cy="310896"/>
+          </a:xfrm>
+          <a:prstGeom prst="rect">
+            <a:avLst/>
+          </a:prstGeom>
+          <a:noFill/>
+        </p:spPr>
+        <p:txBody>
+          <a:bodyPr wrap="square">
+            <a:spAutoFit/>
+          </a:bodyPr>
+          <a:lstStyle/>
+          <a:p>
+            <a:pPr algn="ctr"/>
+            <a:r>
+              <a:rPr sz="2000" b="0" i="0">
+                <a:solidFill>
+                  <a:srgbClr val="828282"/>
+                </a:solidFill>
+                <a:latin typeface="Arial"/>
+              </a:rPr>
+              <a:t>処女が身ごもった</a:t>
+            </a:r>
+          </a:p>
+        </p:txBody>
+      </p:sp>
+      <p:sp>
+        <p:nvSpPr>
+          <p:cNvPr id="5" name="TextBox 4"/>
+          <p:cNvSpPr txBox="1"/>
+          <p:nvPr/>
+        </p:nvSpPr>
+        <p:spPr>
+          <a:xfrm>
+            <a:off x="640080" y="4494276"/>
+            <a:ext cx="10911535" cy="310896"/>
+          </a:xfrm>
+          <a:prstGeom prst="rect">
+            <a:avLst/>
+          </a:prstGeom>
+          <a:noFill/>
+        </p:spPr>
+        <p:txBody>
+          <a:bodyPr wrap="square">
+            <a:spAutoFit/>
+          </a:bodyPr>
+          <a:lstStyle/>
+          <a:p>
+            <a:pPr algn="ctr"/>
+            <a:r>
+              <a:rPr sz="2000" b="0" i="0">
+                <a:solidFill>
+                  <a:srgbClr val="828282"/>
+                </a:solidFill>
+                <a:latin typeface="Arial"/>
+              </a:rPr>
+              <a:t>神の子、救い主</a:t>
+            </a:r>
+          </a:p>
+        </p:txBody>
+      </p:sp>
     </p:spTree>
   </p:cSld>
   <p:clrMapOvr>
@@ -6334,6 +7139,76 @@
           </a:p>
         </p:txBody>
       </p:sp>
+      <p:sp>
+        <p:nvSpPr>
+          <p:cNvPr id="4" name="TextBox 3"/>
+          <p:cNvSpPr txBox="1"/>
+          <p:nvPr/>
+        </p:nvSpPr>
+        <p:spPr>
+          <a:xfrm>
+            <a:off x="640080" y="4128516"/>
+            <a:ext cx="10911535" cy="310896"/>
+          </a:xfrm>
+          <a:prstGeom prst="rect">
+            <a:avLst/>
+          </a:prstGeom>
+          <a:noFill/>
+        </p:spPr>
+        <p:txBody>
+          <a:bodyPr wrap="square">
+            <a:spAutoFit/>
+          </a:bodyPr>
+          <a:lstStyle/>
+          <a:p>
+            <a:pPr algn="ctr"/>
+            <a:r>
+              <a:rPr sz="2000" b="0" i="0">
+                <a:solidFill>
+                  <a:srgbClr val="828282"/>
+                </a:solidFill>
+                <a:latin typeface="Arial"/>
+              </a:rPr>
+              <a:t>イエスが生まれた、生まれた</a:t>
+            </a:r>
+          </a:p>
+        </p:txBody>
+      </p:sp>
+      <p:sp>
+        <p:nvSpPr>
+          <p:cNvPr id="5" name="TextBox 4"/>
+          <p:cNvSpPr txBox="1"/>
+          <p:nvPr/>
+        </p:nvSpPr>
+        <p:spPr>
+          <a:xfrm>
+            <a:off x="640080" y="4494276"/>
+            <a:ext cx="10911535" cy="310896"/>
+          </a:xfrm>
+          <a:prstGeom prst="rect">
+            <a:avLst/>
+          </a:prstGeom>
+          <a:noFill/>
+        </p:spPr>
+        <p:txBody>
+          <a:bodyPr wrap="square">
+            <a:spAutoFit/>
+          </a:bodyPr>
+          <a:lstStyle/>
+          <a:p>
+            <a:pPr algn="ctr"/>
+            <a:r>
+              <a:rPr sz="2000" b="0" i="0">
+                <a:solidFill>
+                  <a:srgbClr val="828282"/>
+                </a:solidFill>
+                <a:latin typeface="Arial"/>
+              </a:rPr>
+              <a:t>王の王</a:t>
+            </a:r>
+          </a:p>
+        </p:txBody>
+      </p:sp>
     </p:spTree>
   </p:cSld>
   <p:clrMapOvr>
@@ -6723,6 +7598,41 @@
                 <a:latin typeface="Arial"/>
               </a:rPr>
               <a:t>Aleluia</a:t>
+            </a:r>
+          </a:p>
+        </p:txBody>
+      </p:sp>
+      <p:sp>
+        <p:nvSpPr>
+          <p:cNvPr id="3" name="TextBox 2"/>
+          <p:cNvSpPr txBox="1"/>
+          <p:nvPr/>
+        </p:nvSpPr>
+        <p:spPr>
+          <a:xfrm>
+            <a:off x="640080" y="3845052"/>
+            <a:ext cx="10911535" cy="310896"/>
+          </a:xfrm>
+          <a:prstGeom prst="rect">
+            <a:avLst/>
+          </a:prstGeom>
+          <a:noFill/>
+        </p:spPr>
+        <p:txBody>
+          <a:bodyPr wrap="square">
+            <a:spAutoFit/>
+          </a:bodyPr>
+          <a:lstStyle/>
+          <a:p>
+            <a:pPr algn="ctr"/>
+            <a:r>
+              <a:rPr sz="2000" b="0" i="0">
+                <a:solidFill>
+                  <a:srgbClr val="828282"/>
+                </a:solidFill>
+                <a:latin typeface="Arial"/>
+              </a:rPr>
+              <a:t>アレルヤ</a:t>
             </a:r>
           </a:p>
         </p:txBody>
